--- a/mon/toan/slide/lop10/BaiGiangDienTu_TOAN10_Bai9_TichVectoVoiMotSo_T30-31.pptx
+++ b/mon/toan/slide/lop10/BaiGiangDienTu_TOAN10_Bai9_TichVectoVoiMotSo_T30-31.pptx
@@ -6710,7 +6710,7 @@
         <mc:Choice xmlns:a14="http://schemas.microsoft.com/office/drawing/2010/main" Requires="a14">
           <p:sp>
             <p:nvSpPr>
-              <p:cNvPr id="10" name="TextBox 9"/>
+              <p:cNvPr id="10" name="s2_chu"/>
               <p:cNvSpPr txBox="1"/>
               <p:nvPr/>
             </p:nvSpPr>
@@ -6971,7 +6971,7 @@
       </mc:AlternateContent>
       <p:sp>
         <p:nvSpPr>
-          <p:cNvPr id="11" name="s2_nen"/>
+          <p:cNvPr id="11" name="s3_nen"/>
           <p:cNvSpPr/>
           <p:nvPr/>
         </p:nvSpPr>
@@ -7021,7 +7021,7 @@
         <mc:Choice xmlns:a14="http://schemas.microsoft.com/office/drawing/2010/main" Requires="a14">
           <p:sp>
             <p:nvSpPr>
-              <p:cNvPr id="12" name="s2_chu"/>
+              <p:cNvPr id="12" name="s3_chu"/>
               <p:cNvSpPr txBox="1"/>
               <p:nvPr/>
             </p:nvSpPr>
@@ -7492,7 +7492,7 @@
       </mc:AlternateContent>
       <p:sp>
         <p:nvSpPr>
-          <p:cNvPr id="13" name="Rounded Rectangle 12"/>
+          <p:cNvPr id="13" name="s4_nen"/>
           <p:cNvSpPr/>
           <p:nvPr/>
         </p:nvSpPr>
@@ -7542,7 +7542,7 @@
         <mc:Choice xmlns:a14="http://schemas.microsoft.com/office/drawing/2010/main" Requires="a14">
           <p:sp>
             <p:nvSpPr>
-              <p:cNvPr id="14" name="TextBox 13"/>
+              <p:cNvPr id="14" name="s4_chu"/>
               <p:cNvSpPr txBox="1"/>
               <p:nvPr/>
             </p:nvSpPr>
@@ -8512,6 +8512,51 @@
                                           </p:stCondLst>
                                         </p:cTn>
                                         <p:tgtEl>
+                                          <p:spTgt spid="10"/>
+                                        </p:tgtEl>
+                                        <p:attrNameLst>
+                                          <p:attrName>style.visibility</p:attrName>
+                                        </p:attrNameLst>
+                                      </p:cBhvr>
+                                      <p:to>
+                                        <p:strVal val="visible"/>
+                                      </p:to>
+                                    </p:set>
+                                  </p:childTnLst>
+                                </p:cTn>
+                              </p:par>
+                            </p:childTnLst>
+                          </p:cTn>
+                        </p:par>
+                      </p:childTnLst>
+                    </p:cTn>
+                  </p:par>
+                  <p:par>
+                    <p:cTn id="13" fill="hold">
+                      <p:stCondLst>
+                        <p:cond delay="indefinite"/>
+                      </p:stCondLst>
+                      <p:childTnLst>
+                        <p:par>
+                          <p:cTn id="14" fill="hold">
+                            <p:stCondLst>
+                              <p:cond delay="0"/>
+                            </p:stCondLst>
+                            <p:childTnLst>
+                              <p:par>
+                                <p:cTn id="15" presetID="1" presetClass="entr" presetSubtype="0" fill="hold" nodeType="clickEffect">
+                                  <p:stCondLst>
+                                    <p:cond delay="0"/>
+                                  </p:stCondLst>
+                                  <p:childTnLst>
+                                    <p:set>
+                                      <p:cBhvr>
+                                        <p:cTn id="16" dur="1" fill="hold">
+                                          <p:stCondLst>
+                                            <p:cond delay="0"/>
+                                          </p:stCondLst>
+                                        </p:cTn>
+                                        <p:tgtEl>
                                           <p:spTgt spid="11"/>
                                         </p:tgtEl>
                                         <p:attrNameLst>
@@ -8526,20 +8571,92 @@
                                 </p:cTn>
                               </p:par>
                               <p:par>
-                                <p:cTn id="13" presetID="1" presetClass="entr" presetSubtype="0" fill="hold" nodeType="withEffect">
+                                <p:cTn id="17" presetID="1" presetClass="entr" presetSubtype="0" fill="hold" nodeType="withEffect">
                                   <p:stCondLst>
                                     <p:cond delay="0"/>
                                   </p:stCondLst>
                                   <p:childTnLst>
                                     <p:set>
                                       <p:cBhvr>
-                                        <p:cTn id="14" dur="1" fill="hold">
+                                        <p:cTn id="18" dur="1" fill="hold">
                                           <p:stCondLst>
                                             <p:cond delay="0"/>
                                           </p:stCondLst>
                                         </p:cTn>
                                         <p:tgtEl>
                                           <p:spTgt spid="12"/>
+                                        </p:tgtEl>
+                                        <p:attrNameLst>
+                                          <p:attrName>style.visibility</p:attrName>
+                                        </p:attrNameLst>
+                                      </p:cBhvr>
+                                      <p:to>
+                                        <p:strVal val="visible"/>
+                                      </p:to>
+                                    </p:set>
+                                  </p:childTnLst>
+                                </p:cTn>
+                              </p:par>
+                            </p:childTnLst>
+                          </p:cTn>
+                        </p:par>
+                      </p:childTnLst>
+                    </p:cTn>
+                  </p:par>
+                  <p:par>
+                    <p:cTn id="19" fill="hold">
+                      <p:stCondLst>
+                        <p:cond delay="indefinite"/>
+                      </p:stCondLst>
+                      <p:childTnLst>
+                        <p:par>
+                          <p:cTn id="20" fill="hold">
+                            <p:stCondLst>
+                              <p:cond delay="0"/>
+                            </p:stCondLst>
+                            <p:childTnLst>
+                              <p:par>
+                                <p:cTn id="21" presetID="1" presetClass="entr" presetSubtype="0" fill="hold" nodeType="clickEffect">
+                                  <p:stCondLst>
+                                    <p:cond delay="0"/>
+                                  </p:stCondLst>
+                                  <p:childTnLst>
+                                    <p:set>
+                                      <p:cBhvr>
+                                        <p:cTn id="22" dur="1" fill="hold">
+                                          <p:stCondLst>
+                                            <p:cond delay="0"/>
+                                          </p:stCondLst>
+                                        </p:cTn>
+                                        <p:tgtEl>
+                                          <p:spTgt spid="13"/>
+                                        </p:tgtEl>
+                                        <p:attrNameLst>
+                                          <p:attrName>style.visibility</p:attrName>
+                                        </p:attrNameLst>
+                                      </p:cBhvr>
+                                      <p:to>
+                                        <p:strVal val="visible"/>
+                                      </p:to>
+                                    </p:set>
+                                  </p:childTnLst>
+                                </p:cTn>
+                              </p:par>
+                              <p:par>
+                                <p:cTn id="23" presetID="1" presetClass="entr" presetSubtype="0" fill="hold" nodeType="withEffect">
+                                  <p:stCondLst>
+                                    <p:cond delay="0"/>
+                                  </p:stCondLst>
+                                  <p:childTnLst>
+                                    <p:set>
+                                      <p:cBhvr>
+                                        <p:cTn id="24" dur="1" fill="hold">
+                                          <p:stCondLst>
+                                            <p:cond delay="0"/>
+                                          </p:stCondLst>
+                                        </p:cTn>
+                                        <p:tgtEl>
+                                          <p:spTgt spid="14"/>
                                         </p:tgtEl>
                                         <p:attrNameLst>
                                           <p:attrName>style.visibility</p:attrName>
@@ -9960,7 +10077,7 @@
             <p:spPr>
               <a:xfrm>
                 <a:off x="548640" y="1828800"/>
-                <a:ext cx="8229600" cy="548640"/>
+                <a:ext cx="8229600" cy="509016"/>
               </a:xfrm>
               <a:prstGeom prst="rect">
                 <a:avLst/>
@@ -10048,7 +10165,7 @@
             <p:spPr>
               <a:xfrm>
                 <a:off x="548640" y="1828800"/>
-                <a:ext cx="8229600" cy="548640"/>
+                <a:ext cx="8229600" cy="509016"/>
               </a:xfrm>
               <a:prstGeom prst="rect">
                 <a:avLst/>
@@ -10103,8 +10220,8 @@
             </p:nvSpPr>
             <p:spPr>
               <a:xfrm>
-                <a:off x="548640" y="2423160"/>
-                <a:ext cx="8229600" cy="704087"/>
+                <a:off x="548640" y="2474976"/>
+                <a:ext cx="8229600" cy="693724"/>
               </a:xfrm>
               <a:prstGeom prst="rect">
                 <a:avLst/>
@@ -10220,8 +10337,8 @@
             </p:nvSpPr>
             <p:spPr>
               <a:xfrm>
-                <a:off x="548640" y="2423160"/>
-                <a:ext cx="8229600" cy="704087"/>
+                <a:off x="548640" y="2474976"/>
+                <a:ext cx="8229600" cy="693724"/>
               </a:xfrm>
               <a:prstGeom prst="rect">
                 <a:avLst/>
@@ -10296,8 +10413,8 @@
         </p:nvSpPr>
         <p:spPr>
           <a:xfrm>
-            <a:off x="8961120" y="2423160"/>
-            <a:ext cx="2651759" cy="640080"/>
+            <a:off x="8961120" y="2474976"/>
+            <a:ext cx="2651759" cy="629716"/>
           </a:xfrm>
           <a:prstGeom prst="roundRect">
             <a:avLst/>
@@ -10340,8 +10457,8 @@
         </p:nvSpPr>
         <p:spPr>
           <a:xfrm>
-            <a:off x="8961120" y="2478024"/>
-            <a:ext cx="2651759" cy="612647"/>
+            <a:off x="8961120" y="2529840"/>
+            <a:ext cx="2651759" cy="602284"/>
           </a:xfrm>
           <a:prstGeom prst="rect">
             <a:avLst/>
@@ -10390,8 +10507,8 @@
             </p:nvSpPr>
             <p:spPr>
               <a:xfrm>
-                <a:off x="548640" y="3172968"/>
-                <a:ext cx="8229600" cy="704087"/>
+                <a:off x="548640" y="3214420"/>
+                <a:ext cx="8229600" cy="693724"/>
               </a:xfrm>
               <a:prstGeom prst="rect">
                 <a:avLst/>
@@ -10487,8 +10604,8 @@
             </p:nvSpPr>
             <p:spPr>
               <a:xfrm>
-                <a:off x="548640" y="3172968"/>
-                <a:ext cx="8229600" cy="704087"/>
+                <a:off x="548640" y="3214420"/>
+                <a:ext cx="8229600" cy="693724"/>
               </a:xfrm>
               <a:prstGeom prst="rect">
                 <a:avLst/>
@@ -10550,8 +10667,8 @@
         </p:nvSpPr>
         <p:spPr>
           <a:xfrm>
-            <a:off x="8961120" y="3172968"/>
-            <a:ext cx="2651759" cy="640080"/>
+            <a:off x="8961120" y="3214420"/>
+            <a:ext cx="2651759" cy="629716"/>
           </a:xfrm>
           <a:prstGeom prst="roundRect">
             <a:avLst/>
@@ -10594,8 +10711,8 @@
         </p:nvSpPr>
         <p:spPr>
           <a:xfrm>
-            <a:off x="8961120" y="3227832"/>
-            <a:ext cx="2651759" cy="612647"/>
+            <a:off x="8961120" y="3269284"/>
+            <a:ext cx="2651759" cy="602284"/>
           </a:xfrm>
           <a:prstGeom prst="rect">
             <a:avLst/>
@@ -10635,8 +10752,8 @@
             </p:nvSpPr>
             <p:spPr>
               <a:xfrm>
-                <a:off x="548640" y="3922776"/>
-                <a:ext cx="8229600" cy="704087"/>
+                <a:off x="548640" y="3953865"/>
+                <a:ext cx="8229600" cy="693724"/>
               </a:xfrm>
               <a:prstGeom prst="rect">
                 <a:avLst/>
@@ -10752,8 +10869,8 @@
             </p:nvSpPr>
             <p:spPr>
               <a:xfrm>
-                <a:off x="548640" y="3922776"/>
-                <a:ext cx="8229600" cy="704087"/>
+                <a:off x="548640" y="3953865"/>
+                <a:ext cx="8229600" cy="693724"/>
               </a:xfrm>
               <a:prstGeom prst="rect">
                 <a:avLst/>
@@ -10828,8 +10945,8 @@
         </p:nvSpPr>
         <p:spPr>
           <a:xfrm>
-            <a:off x="8961120" y="3922776"/>
-            <a:ext cx="2651759" cy="640080"/>
+            <a:off x="8961120" y="3953865"/>
+            <a:ext cx="2651759" cy="629716"/>
           </a:xfrm>
           <a:prstGeom prst="roundRect">
             <a:avLst/>
@@ -10872,8 +10989,8 @@
         </p:nvSpPr>
         <p:spPr>
           <a:xfrm>
-            <a:off x="8961120" y="3977639"/>
-            <a:ext cx="2651759" cy="612647"/>
+            <a:off x="8961120" y="4008729"/>
+            <a:ext cx="2651759" cy="602284"/>
           </a:xfrm>
           <a:prstGeom prst="rect">
             <a:avLst/>
@@ -10913,8 +11030,8 @@
             </p:nvSpPr>
             <p:spPr>
               <a:xfrm>
-                <a:off x="548640" y="4672583"/>
-                <a:ext cx="8229600" cy="704087"/>
+                <a:off x="548640" y="4693310"/>
+                <a:ext cx="8229600" cy="693724"/>
               </a:xfrm>
               <a:prstGeom prst="rect">
                 <a:avLst/>
@@ -11026,8 +11143,8 @@
             </p:nvSpPr>
             <p:spPr>
               <a:xfrm>
-                <a:off x="548640" y="4672583"/>
-                <a:ext cx="8229600" cy="704087"/>
+                <a:off x="548640" y="4693310"/>
+                <a:ext cx="8229600" cy="693724"/>
               </a:xfrm>
               <a:prstGeom prst="rect">
                 <a:avLst/>
@@ -11089,8 +11206,8 @@
         </p:nvSpPr>
         <p:spPr>
           <a:xfrm>
-            <a:off x="8961120" y="4672583"/>
-            <a:ext cx="2651759" cy="640080"/>
+            <a:off x="8961120" y="4693310"/>
+            <a:ext cx="2651759" cy="629716"/>
           </a:xfrm>
           <a:prstGeom prst="roundRect">
             <a:avLst/>
@@ -11133,8 +11250,8 @@
         </p:nvSpPr>
         <p:spPr>
           <a:xfrm>
-            <a:off x="8961120" y="4727447"/>
-            <a:ext cx="2651759" cy="612647"/>
+            <a:off x="8961120" y="4748174"/>
+            <a:ext cx="2651759" cy="602284"/>
           </a:xfrm>
           <a:prstGeom prst="rect">
             <a:avLst/>
@@ -11183,8 +11300,8 @@
             </p:nvSpPr>
             <p:spPr>
               <a:xfrm>
-                <a:off x="548640" y="5422392"/>
-                <a:ext cx="8229600" cy="704087"/>
+                <a:off x="548640" y="5432755"/>
+                <a:ext cx="8229600" cy="693724"/>
               </a:xfrm>
               <a:prstGeom prst="rect">
                 <a:avLst/>
@@ -11280,8 +11397,8 @@
             </p:nvSpPr>
             <p:spPr>
               <a:xfrm>
-                <a:off x="548640" y="5422392"/>
-                <a:ext cx="8229600" cy="704087"/>
+                <a:off x="548640" y="5432755"/>
+                <a:ext cx="8229600" cy="693724"/>
               </a:xfrm>
               <a:prstGeom prst="rect">
                 <a:avLst/>
@@ -11343,8 +11460,8 @@
         </p:nvSpPr>
         <p:spPr>
           <a:xfrm>
-            <a:off x="8961120" y="5422392"/>
-            <a:ext cx="2651759" cy="640080"/>
+            <a:off x="8961120" y="5432755"/>
+            <a:ext cx="2651759" cy="629716"/>
           </a:xfrm>
           <a:prstGeom prst="roundRect">
             <a:avLst/>
@@ -11387,8 +11504,8 @@
         </p:nvSpPr>
         <p:spPr>
           <a:xfrm>
-            <a:off x="8961120" y="5477255"/>
-            <a:ext cx="2651759" cy="612647"/>
+            <a:off x="8961120" y="5487619"/>
+            <a:ext cx="2651759" cy="602284"/>
           </a:xfrm>
           <a:prstGeom prst="rect">
             <a:avLst/>
@@ -17028,7 +17145,7 @@
         <mc:Choice xmlns:a14="http://schemas.microsoft.com/office/drawing/2010/main" Requires="a14">
           <p:sp>
             <p:nvSpPr>
-              <p:cNvPr id="10" name="TextBox 9"/>
+              <p:cNvPr id="10" name="s2_chu"/>
               <p:cNvSpPr txBox="1"/>
               <p:nvPr/>
             </p:nvSpPr>
@@ -17436,7 +17553,7 @@
       </mc:AlternateContent>
       <p:sp>
         <p:nvSpPr>
-          <p:cNvPr id="11" name="s2_nen"/>
+          <p:cNvPr id="11" name="s3_nen"/>
           <p:cNvSpPr/>
           <p:nvPr/>
         </p:nvSpPr>
@@ -17486,7 +17603,7 @@
         <mc:Choice xmlns:a14="http://schemas.microsoft.com/office/drawing/2010/main" Requires="a14">
           <p:sp>
             <p:nvSpPr>
-              <p:cNvPr id="12" name="s2_chu"/>
+              <p:cNvPr id="12" name="s3_chu"/>
               <p:cNvSpPr txBox="1"/>
               <p:nvPr/>
             </p:nvSpPr>
@@ -17974,7 +18091,7 @@
       </mc:AlternateContent>
       <p:sp>
         <p:nvSpPr>
-          <p:cNvPr id="13" name="Rounded Rectangle 12"/>
+          <p:cNvPr id="13" name="s4_nen"/>
           <p:cNvSpPr/>
           <p:nvPr/>
         </p:nvSpPr>
@@ -18024,7 +18141,7 @@
         <mc:Choice xmlns:a14="http://schemas.microsoft.com/office/drawing/2010/main" Requires="a14">
           <p:sp>
             <p:nvSpPr>
-              <p:cNvPr id="14" name="TextBox 13"/>
+              <p:cNvPr id="14" name="s4_chu"/>
               <p:cNvSpPr txBox="1"/>
               <p:nvPr/>
             </p:nvSpPr>
@@ -18667,6 +18784,51 @@
                                           </p:stCondLst>
                                         </p:cTn>
                                         <p:tgtEl>
+                                          <p:spTgt spid="10"/>
+                                        </p:tgtEl>
+                                        <p:attrNameLst>
+                                          <p:attrName>style.visibility</p:attrName>
+                                        </p:attrNameLst>
+                                      </p:cBhvr>
+                                      <p:to>
+                                        <p:strVal val="visible"/>
+                                      </p:to>
+                                    </p:set>
+                                  </p:childTnLst>
+                                </p:cTn>
+                              </p:par>
+                            </p:childTnLst>
+                          </p:cTn>
+                        </p:par>
+                      </p:childTnLst>
+                    </p:cTn>
+                  </p:par>
+                  <p:par>
+                    <p:cTn id="13" fill="hold">
+                      <p:stCondLst>
+                        <p:cond delay="indefinite"/>
+                      </p:stCondLst>
+                      <p:childTnLst>
+                        <p:par>
+                          <p:cTn id="14" fill="hold">
+                            <p:stCondLst>
+                              <p:cond delay="0"/>
+                            </p:stCondLst>
+                            <p:childTnLst>
+                              <p:par>
+                                <p:cTn id="15" presetID="1" presetClass="entr" presetSubtype="0" fill="hold" nodeType="clickEffect">
+                                  <p:stCondLst>
+                                    <p:cond delay="0"/>
+                                  </p:stCondLst>
+                                  <p:childTnLst>
+                                    <p:set>
+                                      <p:cBhvr>
+                                        <p:cTn id="16" dur="1" fill="hold">
+                                          <p:stCondLst>
+                                            <p:cond delay="0"/>
+                                          </p:stCondLst>
+                                        </p:cTn>
+                                        <p:tgtEl>
                                           <p:spTgt spid="11"/>
                                         </p:tgtEl>
                                         <p:attrNameLst>
@@ -18681,20 +18843,92 @@
                                 </p:cTn>
                               </p:par>
                               <p:par>
-                                <p:cTn id="13" presetID="1" presetClass="entr" presetSubtype="0" fill="hold" nodeType="withEffect">
+                                <p:cTn id="17" presetID="1" presetClass="entr" presetSubtype="0" fill="hold" nodeType="withEffect">
                                   <p:stCondLst>
                                     <p:cond delay="0"/>
                                   </p:stCondLst>
                                   <p:childTnLst>
                                     <p:set>
                                       <p:cBhvr>
-                                        <p:cTn id="14" dur="1" fill="hold">
+                                        <p:cTn id="18" dur="1" fill="hold">
                                           <p:stCondLst>
                                             <p:cond delay="0"/>
                                           </p:stCondLst>
                                         </p:cTn>
                                         <p:tgtEl>
                                           <p:spTgt spid="12"/>
+                                        </p:tgtEl>
+                                        <p:attrNameLst>
+                                          <p:attrName>style.visibility</p:attrName>
+                                        </p:attrNameLst>
+                                      </p:cBhvr>
+                                      <p:to>
+                                        <p:strVal val="visible"/>
+                                      </p:to>
+                                    </p:set>
+                                  </p:childTnLst>
+                                </p:cTn>
+                              </p:par>
+                            </p:childTnLst>
+                          </p:cTn>
+                        </p:par>
+                      </p:childTnLst>
+                    </p:cTn>
+                  </p:par>
+                  <p:par>
+                    <p:cTn id="19" fill="hold">
+                      <p:stCondLst>
+                        <p:cond delay="indefinite"/>
+                      </p:stCondLst>
+                      <p:childTnLst>
+                        <p:par>
+                          <p:cTn id="20" fill="hold">
+                            <p:stCondLst>
+                              <p:cond delay="0"/>
+                            </p:stCondLst>
+                            <p:childTnLst>
+                              <p:par>
+                                <p:cTn id="21" presetID="1" presetClass="entr" presetSubtype="0" fill="hold" nodeType="clickEffect">
+                                  <p:stCondLst>
+                                    <p:cond delay="0"/>
+                                  </p:stCondLst>
+                                  <p:childTnLst>
+                                    <p:set>
+                                      <p:cBhvr>
+                                        <p:cTn id="22" dur="1" fill="hold">
+                                          <p:stCondLst>
+                                            <p:cond delay="0"/>
+                                          </p:stCondLst>
+                                        </p:cTn>
+                                        <p:tgtEl>
+                                          <p:spTgt spid="13"/>
+                                        </p:tgtEl>
+                                        <p:attrNameLst>
+                                          <p:attrName>style.visibility</p:attrName>
+                                        </p:attrNameLst>
+                                      </p:cBhvr>
+                                      <p:to>
+                                        <p:strVal val="visible"/>
+                                      </p:to>
+                                    </p:set>
+                                  </p:childTnLst>
+                                </p:cTn>
+                              </p:par>
+                              <p:par>
+                                <p:cTn id="23" presetID="1" presetClass="entr" presetSubtype="0" fill="hold" nodeType="withEffect">
+                                  <p:stCondLst>
+                                    <p:cond delay="0"/>
+                                  </p:stCondLst>
+                                  <p:childTnLst>
+                                    <p:set>
+                                      <p:cBhvr>
+                                        <p:cTn id="24" dur="1" fill="hold">
+                                          <p:stCondLst>
+                                            <p:cond delay="0"/>
+                                          </p:stCondLst>
+                                        </p:cTn>
+                                        <p:tgtEl>
+                                          <p:spTgt spid="14"/>
                                         </p:tgtEl>
                                         <p:attrNameLst>
                                           <p:attrName>style.visibility</p:attrName>
@@ -19938,7 +20172,7 @@
       </mc:AlternateContent>
       <p:sp>
         <p:nvSpPr>
-          <p:cNvPr id="10" name="Rounded Rectangle 9"/>
+          <p:cNvPr id="10" name="s2_nen"/>
           <p:cNvSpPr/>
           <p:nvPr/>
         </p:nvSpPr>
@@ -19988,7 +20222,7 @@
         <mc:Choice xmlns:a14="http://schemas.microsoft.com/office/drawing/2010/main" Requires="a14">
           <p:sp>
             <p:nvSpPr>
-              <p:cNvPr id="11" name="TextBox 10"/>
+              <p:cNvPr id="11" name="s2_chu"/>
               <p:cNvSpPr txBox="1"/>
               <p:nvPr/>
             </p:nvSpPr>
@@ -20604,6 +20838,78 @@
                                         </p:cTn>
                                         <p:tgtEl>
                                           <p:spTgt spid="9"/>
+                                        </p:tgtEl>
+                                        <p:attrNameLst>
+                                          <p:attrName>style.visibility</p:attrName>
+                                        </p:attrNameLst>
+                                      </p:cBhvr>
+                                      <p:to>
+                                        <p:strVal val="visible"/>
+                                      </p:to>
+                                    </p:set>
+                                  </p:childTnLst>
+                                </p:cTn>
+                              </p:par>
+                            </p:childTnLst>
+                          </p:cTn>
+                        </p:par>
+                      </p:childTnLst>
+                    </p:cTn>
+                  </p:par>
+                  <p:par>
+                    <p:cTn id="9" fill="hold">
+                      <p:stCondLst>
+                        <p:cond delay="indefinite"/>
+                      </p:stCondLst>
+                      <p:childTnLst>
+                        <p:par>
+                          <p:cTn id="10" fill="hold">
+                            <p:stCondLst>
+                              <p:cond delay="0"/>
+                            </p:stCondLst>
+                            <p:childTnLst>
+                              <p:par>
+                                <p:cTn id="11" presetID="1" presetClass="entr" presetSubtype="0" fill="hold" nodeType="clickEffect">
+                                  <p:stCondLst>
+                                    <p:cond delay="0"/>
+                                  </p:stCondLst>
+                                  <p:childTnLst>
+                                    <p:set>
+                                      <p:cBhvr>
+                                        <p:cTn id="12" dur="1" fill="hold">
+                                          <p:stCondLst>
+                                            <p:cond delay="0"/>
+                                          </p:stCondLst>
+                                        </p:cTn>
+                                        <p:tgtEl>
+                                          <p:spTgt spid="10"/>
+                                        </p:tgtEl>
+                                        <p:attrNameLst>
+                                          <p:attrName>style.visibility</p:attrName>
+                                        </p:attrNameLst>
+                                      </p:cBhvr>
+                                      <p:to>
+                                        <p:strVal val="visible"/>
+                                      </p:to>
+                                    </p:set>
+                                  </p:childTnLst>
+                                </p:cTn>
+                              </p:par>
+                              <p:par>
+                                <p:cTn id="13" presetID="1" presetClass="entr" presetSubtype="0" fill="hold" nodeType="withEffect">
+                                  <p:stCondLst>
+                                    <p:cond delay="0"/>
+                                  </p:stCondLst>
+                                  <p:childTnLst>
+                                    <p:set>
+                                      <p:cBhvr>
+                                        <p:cTn id="14" dur="1" fill="hold">
+                                          <p:stCondLst>
+                                            <p:cond delay="0"/>
+                                          </p:stCondLst>
+                                        </p:cTn>
+                                        <p:tgtEl>
+                                          <p:spTgt spid="11"/>
                                         </p:tgtEl>
                                         <p:attrNameLst>
                                           <p:attrName>style.visibility</p:attrName>
@@ -27952,7 +28258,7 @@
             <p:spPr>
               <a:xfrm>
                 <a:off x="548640" y="1371600"/>
-                <a:ext cx="11064240" cy="1493520"/>
+                <a:ext cx="11064240" cy="783335"/>
               </a:xfrm>
               <a:prstGeom prst="rect">
                 <a:avLst/>
@@ -28142,306 +28448,6 @@
                   <a:t>.</a:t>
                 </a:r>
               </a:p>
-              <a:p>
-                <a:pPr algn="l">
-                  <a:spcAft>
-                    <a:spcPts val="800"/>
-                  </a:spcAft>
-                </a:pPr>
-                <a:r>
-                  <a:rPr sz="2000" b="1">
-                    <a:solidFill>
-                      <a:srgbClr val="1E293B"/>
-                    </a:solidFill>
-                    <a:latin typeface="Calibri"/>
-                  </a:rPr>
-                  <a:t>4.12.</a:t>
-                </a:r>
-                <a:r>
-                  <a:rPr sz="2000">
-                    <a:solidFill>
-                      <a:srgbClr val="1E293B"/>
-                    </a:solidFill>
-                    <a:latin typeface="Calibri"/>
-                  </a:rPr>
-                  <a:t> Cho tứ giác </a:t>
-                </a:r>
-                <a14:m>
-                  <m:oMath xmlns:m="http://schemas.openxmlformats.org/officeDocument/2006/math">
-                    <m:r>
-                      <a:rPr lang="vi-VN" sz="2000" b="0">
-                        <a:solidFill>
-                          <a:srgbClr val="1E293B"/>
-                        </a:solidFill>
-                        <a:latin typeface="Cambria Math" panose="02040503050406030204" pitchFamily="18" charset="0"/>
-                      </a:rPr>
-                      <m:t>ABCD</m:t>
-                    </m:r>
-                  </m:oMath>
-                </a14:m>
-                <a:r>
-                  <a:rPr sz="2000">
-                    <a:solidFill>
-                      <a:srgbClr val="1E293B"/>
-                    </a:solidFill>
-                    <a:latin typeface="Calibri"/>
-                  </a:rPr>
-                  <a:t>. Gọi </a:t>
-                </a:r>
-                <a14:m>
-                  <m:oMath xmlns:m="http://schemas.openxmlformats.org/officeDocument/2006/math">
-                    <m:r>
-                      <a:rPr lang="vi-VN" sz="2000" b="0">
-                        <a:solidFill>
-                          <a:srgbClr val="1E293B"/>
-                        </a:solidFill>
-                        <a:latin typeface="Cambria Math" panose="02040503050406030204" pitchFamily="18" charset="0"/>
-                      </a:rPr>
-                      <m:t>M,</m:t>
-                    </m:r>
-                    <m:r>
-                      <m:rPr>
-                        <m:sty m:val="p"/>
-                      </m:rPr>
-                      <a:rPr lang="vi-VN" sz="2000" b="0">
-                        <a:solidFill>
-                          <a:srgbClr val="1E293B"/>
-                        </a:solidFill>
-                        <a:latin typeface="Cambria Math" panose="02040503050406030204" pitchFamily="18" charset="0"/>
-                      </a:rPr>
-                      <m:t> </m:t>
-                    </m:r>
-                    <m:r>
-                      <a:rPr lang="vi-VN" sz="2000" b="0">
-                        <a:solidFill>
-                          <a:srgbClr val="1E293B"/>
-                        </a:solidFill>
-                        <a:latin typeface="Cambria Math" panose="02040503050406030204" pitchFamily="18" charset="0"/>
-                      </a:rPr>
-                      <m:t>N</m:t>
-                    </m:r>
-                  </m:oMath>
-                </a14:m>
-                <a:r>
-                  <a:rPr sz="2000">
-                    <a:solidFill>
-                      <a:srgbClr val="1E293B"/>
-                    </a:solidFill>
-                    <a:latin typeface="Calibri"/>
-                  </a:rPr>
-                  <a:t> tương ứng là trung điểm của các cạnh </a:t>
-                </a:r>
-                <a14:m>
-                  <m:oMath xmlns:m="http://schemas.openxmlformats.org/officeDocument/2006/math">
-                    <m:r>
-                      <a:rPr lang="vi-VN" sz="2000" b="0">
-                        <a:solidFill>
-                          <a:srgbClr val="1E293B"/>
-                        </a:solidFill>
-                        <a:latin typeface="Cambria Math" panose="02040503050406030204" pitchFamily="18" charset="0"/>
-                      </a:rPr>
-                      <m:t>AB,</m:t>
-                    </m:r>
-                    <m:r>
-                      <m:rPr>
-                        <m:sty m:val="p"/>
-                      </m:rPr>
-                      <a:rPr lang="vi-VN" sz="2000" b="0">
-                        <a:solidFill>
-                          <a:srgbClr val="1E293B"/>
-                        </a:solidFill>
-                        <a:latin typeface="Cambria Math" panose="02040503050406030204" pitchFamily="18" charset="0"/>
-                      </a:rPr>
-                      <m:t> </m:t>
-                    </m:r>
-                    <m:r>
-                      <a:rPr lang="vi-VN" sz="2000" b="0">
-                        <a:solidFill>
-                          <a:srgbClr val="1E293B"/>
-                        </a:solidFill>
-                        <a:latin typeface="Cambria Math" panose="02040503050406030204" pitchFamily="18" charset="0"/>
-                      </a:rPr>
-                      <m:t>CD</m:t>
-                    </m:r>
-                  </m:oMath>
-                </a14:m>
-                <a:r>
-                  <a:rPr sz="2000">
-                    <a:solidFill>
-                      <a:srgbClr val="1E293B"/>
-                    </a:solidFill>
-                    <a:latin typeface="Calibri"/>
-                  </a:rPr>
-                  <a:t>. Chứng minh rằng </a:t>
-                </a:r>
-                <a14:m>
-                  <m:oMath xmlns:m="http://schemas.openxmlformats.org/officeDocument/2006/math">
-                    <m:acc>
-                      <m:accPr>
-                        <m:chr m:val="⃗"/>
-                      </m:accPr>
-                      <m:e>
-                        <m:r>
-                          <a:rPr lang="vi-VN" sz="2000" b="0">
-                            <a:solidFill>
-                              <a:srgbClr val="1E293B"/>
-                            </a:solidFill>
-                            <a:latin typeface="Cambria Math" panose="02040503050406030204" pitchFamily="18" charset="0"/>
-                          </a:rPr>
-                          <m:t>BC</m:t>
-                        </m:r>
-                      </m:e>
-                    </m:acc>
-                  </m:oMath>
-                </a14:m>
-                <a:r>
-                  <a:rPr sz="2000">
-                    <a:solidFill>
-                      <a:srgbClr val="1E293B"/>
-                    </a:solidFill>
-                    <a:latin typeface="Calibri"/>
-                  </a:rPr>
-                  <a:t> + </a:t>
-                </a:r>
-                <a14:m>
-                  <m:oMath xmlns:m="http://schemas.openxmlformats.org/officeDocument/2006/math">
-                    <m:acc>
-                      <m:accPr>
-                        <m:chr m:val="⃗"/>
-                      </m:accPr>
-                      <m:e>
-                        <m:r>
-                          <a:rPr lang="vi-VN" sz="2000" b="0">
-                            <a:solidFill>
-                              <a:srgbClr val="1E293B"/>
-                            </a:solidFill>
-                            <a:latin typeface="Cambria Math" panose="02040503050406030204" pitchFamily="18" charset="0"/>
-                          </a:rPr>
-                          <m:t>AD</m:t>
-                        </m:r>
-                      </m:e>
-                    </m:acc>
-                  </m:oMath>
-                </a14:m>
-                <a:r>
-                  <a:rPr sz="2000">
-                    <a:solidFill>
-                      <a:srgbClr val="1E293B"/>
-                    </a:solidFill>
-                    <a:latin typeface="Calibri"/>
-                  </a:rPr>
-                  <a:t> = </a:t>
-                </a:r>
-                <a14:m>
-                  <m:oMath xmlns:m="http://schemas.openxmlformats.org/officeDocument/2006/math">
-                    <m:r>
-                      <a:rPr lang="vi-VN" sz="2000" b="0">
-                        <a:solidFill>
-                          <a:srgbClr val="1E293B"/>
-                        </a:solidFill>
-                        <a:latin typeface="Cambria Math" panose="02040503050406030204" pitchFamily="18" charset="0"/>
-                      </a:rPr>
-                      <m:t>2</m:t>
-                    </m:r>
-                  </m:oMath>
-                </a14:m>
-                <a:r>
-                  <a:rPr sz="2000">
-                    <a:solidFill>
-                      <a:srgbClr val="1E293B"/>
-                    </a:solidFill>
-                    <a:latin typeface="Calibri"/>
-                  </a:rPr>
-                  <a:t> </a:t>
-                </a:r>
-                <a14:m>
-                  <m:oMath xmlns:m="http://schemas.openxmlformats.org/officeDocument/2006/math">
-                    <m:acc>
-                      <m:accPr>
-                        <m:chr m:val="⃗"/>
-                      </m:accPr>
-                      <m:e>
-                        <m:r>
-                          <a:rPr lang="vi-VN" sz="2000" b="0">
-                            <a:solidFill>
-                              <a:srgbClr val="1E293B"/>
-                            </a:solidFill>
-                            <a:latin typeface="Cambria Math" panose="02040503050406030204" pitchFamily="18" charset="0"/>
-                          </a:rPr>
-                          <m:t>MN</m:t>
-                        </m:r>
-                      </m:e>
-                    </m:acc>
-                  </m:oMath>
-                </a14:m>
-                <a:r>
-                  <a:rPr sz="2000">
-                    <a:solidFill>
-                      <a:srgbClr val="1E293B"/>
-                    </a:solidFill>
-                    <a:latin typeface="Calibri"/>
-                  </a:rPr>
-                  <a:t> = </a:t>
-                </a:r>
-                <a14:m>
-                  <m:oMath xmlns:m="http://schemas.openxmlformats.org/officeDocument/2006/math">
-                    <m:acc>
-                      <m:accPr>
-                        <m:chr m:val="⃗"/>
-                      </m:accPr>
-                      <m:e>
-                        <m:r>
-                          <a:rPr lang="vi-VN" sz="2000" b="0">
-                            <a:solidFill>
-                              <a:srgbClr val="1E293B"/>
-                            </a:solidFill>
-                            <a:latin typeface="Cambria Math" panose="02040503050406030204" pitchFamily="18" charset="0"/>
-                          </a:rPr>
-                          <m:t>AC</m:t>
-                        </m:r>
-                      </m:e>
-                    </m:acc>
-                  </m:oMath>
-                </a14:m>
-                <a:r>
-                  <a:rPr sz="2000">
-                    <a:solidFill>
-                      <a:srgbClr val="1E293B"/>
-                    </a:solidFill>
-                    <a:latin typeface="Calibri"/>
-                  </a:rPr>
-                  <a:t> + </a:t>
-                </a:r>
-                <a14:m>
-                  <m:oMath xmlns:m="http://schemas.openxmlformats.org/officeDocument/2006/math">
-                    <m:acc>
-                      <m:accPr>
-                        <m:chr m:val="⃗"/>
-                      </m:accPr>
-                      <m:e>
-                        <m:r>
-                          <a:rPr lang="vi-VN" sz="2000" b="0">
-                            <a:solidFill>
-                              <a:srgbClr val="1E293B"/>
-                            </a:solidFill>
-                            <a:latin typeface="Cambria Math" panose="02040503050406030204" pitchFamily="18" charset="0"/>
-                          </a:rPr>
-                          <m:t>BD</m:t>
-                        </m:r>
-                      </m:e>
-                    </m:acc>
-                  </m:oMath>
-                </a14:m>
-                <a:r>
-                  <a:rPr sz="2000">
-                    <a:solidFill>
-                      <a:srgbClr val="1E293B"/>
-                    </a:solidFill>
-                    <a:latin typeface="Calibri"/>
-                  </a:rPr>
-                  <a:t>.</a:t>
-                </a:r>
-              </a:p>
             </p:txBody>
           </p:sp>
         </mc:Choice>
@@ -28455,7 +28461,7 @@
             <p:spPr>
               <a:xfrm>
                 <a:off x="548640" y="1371600"/>
-                <a:ext cx="11064240" cy="1493520"/>
+                <a:ext cx="11064240" cy="783335"/>
               </a:xfrm>
               <a:prstGeom prst="rect">
                 <a:avLst/>
@@ -28570,148 +28576,6 @@
                   <a:t>.</a:t>
                 </a:r>
               </a:p>
-              <a:p>
-                <a:pPr algn="l">
-                  <a:spcAft>
-                    <a:spcPts val="800"/>
-                  </a:spcAft>
-                </a:pPr>
-                <a:r>
-                  <a:rPr sz="2000" b="1">
-                    <a:solidFill>
-                      <a:srgbClr val="1E293B"/>
-                    </a:solidFill>
-                    <a:latin typeface="Calibri"/>
-                  </a:rPr>
-                  <a:t>4.12.</a:t>
-                </a:r>
-                <a:r>
-                  <a:rPr sz="2000">
-                    <a:solidFill>
-                      <a:srgbClr val="1E293B"/>
-                    </a:solidFill>
-                    <a:latin typeface="Calibri"/>
-                  </a:rPr>
-                  <a:t> Cho tứ giác </a:t>
-                </a:r>
-                <a:r>
-                  <a:rPr lang="vi-VN"/>
-                  <a:t>ABCD</a:t>
-                </a:r>
-                <a:r>
-                  <a:rPr sz="2000">
-                    <a:solidFill>
-                      <a:srgbClr val="1E293B"/>
-                    </a:solidFill>
-                    <a:latin typeface="Calibri"/>
-                  </a:rPr>
-                  <a:t>. Gọi </a:t>
-                </a:r>
-                <a:r>
-                  <a:rPr lang="vi-VN"/>
-                  <a:t>M,\ N</a:t>
-                </a:r>
-                <a:r>
-                  <a:rPr sz="2000">
-                    <a:solidFill>
-                      <a:srgbClr val="1E293B"/>
-                    </a:solidFill>
-                    <a:latin typeface="Calibri"/>
-                  </a:rPr>
-                  <a:t> tương ứng là trung điểm của các cạnh </a:t>
-                </a:r>
-                <a:r>
-                  <a:rPr lang="vi-VN"/>
-                  <a:t>AB,\ CD</a:t>
-                </a:r>
-                <a:r>
-                  <a:rPr sz="2000">
-                    <a:solidFill>
-                      <a:srgbClr val="1E293B"/>
-                    </a:solidFill>
-                    <a:latin typeface="Calibri"/>
-                  </a:rPr>
-                  <a:t>. Chứng minh rằng </a:t>
-                </a:r>
-                <a:r>
-                  <a:rPr lang="vi-VN"/>
-                  <a:t>\overrightarrow{BC}</a:t>
-                </a:r>
-                <a:r>
-                  <a:rPr sz="2000">
-                    <a:solidFill>
-                      <a:srgbClr val="1E293B"/>
-                    </a:solidFill>
-                    <a:latin typeface="Calibri"/>
-                  </a:rPr>
-                  <a:t> + </a:t>
-                </a:r>
-                <a:r>
-                  <a:rPr lang="vi-VN"/>
-                  <a:t>\overrightarrow{AD}</a:t>
-                </a:r>
-                <a:r>
-                  <a:rPr sz="2000">
-                    <a:solidFill>
-                      <a:srgbClr val="1E293B"/>
-                    </a:solidFill>
-                    <a:latin typeface="Calibri"/>
-                  </a:rPr>
-                  <a:t> = </a:t>
-                </a:r>
-                <a:r>
-                  <a:rPr lang="vi-VN"/>
-                  <a:t>2</a:t>
-                </a:r>
-                <a:r>
-                  <a:rPr sz="2000">
-                    <a:solidFill>
-                      <a:srgbClr val="1E293B"/>
-                    </a:solidFill>
-                    <a:latin typeface="Calibri"/>
-                  </a:rPr>
-                  <a:t> </a:t>
-                </a:r>
-                <a:r>
-                  <a:rPr lang="vi-VN"/>
-                  <a:t>\overrightarrow{MN}</a:t>
-                </a:r>
-                <a:r>
-                  <a:rPr sz="2000">
-                    <a:solidFill>
-                      <a:srgbClr val="1E293B"/>
-                    </a:solidFill>
-                    <a:latin typeface="Calibri"/>
-                  </a:rPr>
-                  <a:t> = </a:t>
-                </a:r>
-                <a:r>
-                  <a:rPr lang="vi-VN"/>
-                  <a:t>\overrightarrow{AC}</a:t>
-                </a:r>
-                <a:r>
-                  <a:rPr sz="2000">
-                    <a:solidFill>
-                      <a:srgbClr val="1E293B"/>
-                    </a:solidFill>
-                    <a:latin typeface="Calibri"/>
-                  </a:rPr>
-                  <a:t> + </a:t>
-                </a:r>
-                <a:r>
-                  <a:rPr lang="vi-VN"/>
-                  <a:t>\overrightarrow{BD}</a:t>
-                </a:r>
-                <a:r>
-                  <a:rPr sz="2000">
-                    <a:solidFill>
-                      <a:srgbClr val="1E293B"/>
-                    </a:solidFill>
-                    <a:latin typeface="Calibri"/>
-                  </a:rPr>
-                  <a:t>.</a:t>
-                </a:r>
-              </a:p>
             </p:txBody>
           </p:sp>
         </mc:Fallback>
@@ -28724,7 +28588,7 @@
         </p:nvSpPr>
         <p:spPr>
           <a:xfrm>
-            <a:off x="548640" y="3002280"/>
+            <a:off x="548640" y="2218944"/>
             <a:ext cx="11064240" cy="707135"/>
           </a:xfrm>
           <a:prstGeom prst="roundRect">
@@ -28774,7 +28638,7 @@
             </p:nvSpPr>
             <p:spPr>
               <a:xfrm>
-                <a:off x="713232" y="3038856"/>
+                <a:off x="713232" y="2255520"/>
                 <a:ext cx="10735056" cy="633983"/>
               </a:xfrm>
               <a:prstGeom prst="rect">
@@ -29009,7 +28873,7 @@
             </p:nvSpPr>
             <p:spPr>
               <a:xfrm>
-                <a:off x="713232" y="3038856"/>
+                <a:off x="713232" y="2255520"/>
                 <a:ext cx="10735056" cy="633983"/>
               </a:xfrm>
               <a:prstGeom prst="rect">
@@ -29129,15 +28993,509 @@
           </p:sp>
         </mc:Fallback>
       </mc:AlternateContent>
+      <mc:AlternateContent xmlns:mc="http://schemas.openxmlformats.org/markup-compatibility/2006">
+        <mc:Choice xmlns:a14="http://schemas.microsoft.com/office/drawing/2010/main" Requires="a14">
+          <p:sp>
+            <p:nvSpPr>
+              <p:cNvPr id="10" name="s2_chu"/>
+              <p:cNvSpPr txBox="1"/>
+              <p:nvPr/>
+            </p:nvSpPr>
+            <p:spPr>
+              <a:xfrm>
+                <a:off x="548640" y="2990088"/>
+                <a:ext cx="11064240" cy="783335"/>
+              </a:xfrm>
+              <a:prstGeom prst="rect">
+                <a:avLst/>
+              </a:prstGeom>
+              <a:noFill/>
+            </p:spPr>
+            <p:txBody>
+              <a:bodyPr wrap="square" anchor="t" lIns="45720" rIns="45720">
+                <a:spAutoFit/>
+              </a:bodyPr>
+              <a:lstStyle/>
+              <a:p>
+                <a:pPr algn="l">
+                  <a:spcAft>
+                    <a:spcPts val="800"/>
+                  </a:spcAft>
+                </a:pPr>
+                <a:r>
+                  <a:rPr sz="2000" b="1">
+                    <a:solidFill>
+                      <a:srgbClr val="1E293B"/>
+                    </a:solidFill>
+                    <a:latin typeface="Calibri"/>
+                  </a:rPr>
+                  <a:t>4.12.</a:t>
+                </a:r>
+                <a:r>
+                  <a:rPr sz="2000">
+                    <a:solidFill>
+                      <a:srgbClr val="1E293B"/>
+                    </a:solidFill>
+                    <a:latin typeface="Calibri"/>
+                  </a:rPr>
+                  <a:t> Cho tứ giác </a:t>
+                </a:r>
+                <a14:m>
+                  <m:oMath xmlns:m="http://schemas.openxmlformats.org/officeDocument/2006/math">
+                    <m:r>
+                      <a:rPr lang="vi-VN" sz="2000" b="0">
+                        <a:solidFill>
+                          <a:srgbClr val="1E293B"/>
+                        </a:solidFill>
+                        <a:latin typeface="Cambria Math" panose="02040503050406030204" pitchFamily="18" charset="0"/>
+                      </a:rPr>
+                      <m:t>ABCD</m:t>
+                    </m:r>
+                  </m:oMath>
+                </a14:m>
+                <a:r>
+                  <a:rPr sz="2000">
+                    <a:solidFill>
+                      <a:srgbClr val="1E293B"/>
+                    </a:solidFill>
+                    <a:latin typeface="Calibri"/>
+                  </a:rPr>
+                  <a:t>. Gọi </a:t>
+                </a:r>
+                <a14:m>
+                  <m:oMath xmlns:m="http://schemas.openxmlformats.org/officeDocument/2006/math">
+                    <m:r>
+                      <a:rPr lang="vi-VN" sz="2000" b="0">
+                        <a:solidFill>
+                          <a:srgbClr val="1E293B"/>
+                        </a:solidFill>
+                        <a:latin typeface="Cambria Math" panose="02040503050406030204" pitchFamily="18" charset="0"/>
+                      </a:rPr>
+                      <m:t>M,</m:t>
+                    </m:r>
+                    <m:r>
+                      <m:rPr>
+                        <m:sty m:val="p"/>
+                      </m:rPr>
+                      <a:rPr lang="vi-VN" sz="2000" b="0">
+                        <a:solidFill>
+                          <a:srgbClr val="1E293B"/>
+                        </a:solidFill>
+                        <a:latin typeface="Cambria Math" panose="02040503050406030204" pitchFamily="18" charset="0"/>
+                      </a:rPr>
+                      <m:t> </m:t>
+                    </m:r>
+                    <m:r>
+                      <a:rPr lang="vi-VN" sz="2000" b="0">
+                        <a:solidFill>
+                          <a:srgbClr val="1E293B"/>
+                        </a:solidFill>
+                        <a:latin typeface="Cambria Math" panose="02040503050406030204" pitchFamily="18" charset="0"/>
+                      </a:rPr>
+                      <m:t>N</m:t>
+                    </m:r>
+                  </m:oMath>
+                </a14:m>
+                <a:r>
+                  <a:rPr sz="2000">
+                    <a:solidFill>
+                      <a:srgbClr val="1E293B"/>
+                    </a:solidFill>
+                    <a:latin typeface="Calibri"/>
+                  </a:rPr>
+                  <a:t> tương ứng là trung điểm của các cạnh </a:t>
+                </a:r>
+                <a14:m>
+                  <m:oMath xmlns:m="http://schemas.openxmlformats.org/officeDocument/2006/math">
+                    <m:r>
+                      <a:rPr lang="vi-VN" sz="2000" b="0">
+                        <a:solidFill>
+                          <a:srgbClr val="1E293B"/>
+                        </a:solidFill>
+                        <a:latin typeface="Cambria Math" panose="02040503050406030204" pitchFamily="18" charset="0"/>
+                      </a:rPr>
+                      <m:t>AB,</m:t>
+                    </m:r>
+                    <m:r>
+                      <m:rPr>
+                        <m:sty m:val="p"/>
+                      </m:rPr>
+                      <a:rPr lang="vi-VN" sz="2000" b="0">
+                        <a:solidFill>
+                          <a:srgbClr val="1E293B"/>
+                        </a:solidFill>
+                        <a:latin typeface="Cambria Math" panose="02040503050406030204" pitchFamily="18" charset="0"/>
+                      </a:rPr>
+                      <m:t> </m:t>
+                    </m:r>
+                    <m:r>
+                      <a:rPr lang="vi-VN" sz="2000" b="0">
+                        <a:solidFill>
+                          <a:srgbClr val="1E293B"/>
+                        </a:solidFill>
+                        <a:latin typeface="Cambria Math" panose="02040503050406030204" pitchFamily="18" charset="0"/>
+                      </a:rPr>
+                      <m:t>CD</m:t>
+                    </m:r>
+                  </m:oMath>
+                </a14:m>
+                <a:r>
+                  <a:rPr sz="2000">
+                    <a:solidFill>
+                      <a:srgbClr val="1E293B"/>
+                    </a:solidFill>
+                    <a:latin typeface="Calibri"/>
+                  </a:rPr>
+                  <a:t>. Chứng minh rằng </a:t>
+                </a:r>
+                <a14:m>
+                  <m:oMath xmlns:m="http://schemas.openxmlformats.org/officeDocument/2006/math">
+                    <m:acc>
+                      <m:accPr>
+                        <m:chr m:val="⃗"/>
+                      </m:accPr>
+                      <m:e>
+                        <m:r>
+                          <a:rPr lang="vi-VN" sz="2000" b="0">
+                            <a:solidFill>
+                              <a:srgbClr val="1E293B"/>
+                            </a:solidFill>
+                            <a:latin typeface="Cambria Math" panose="02040503050406030204" pitchFamily="18" charset="0"/>
+                          </a:rPr>
+                          <m:t>BC</m:t>
+                        </m:r>
+                      </m:e>
+                    </m:acc>
+                  </m:oMath>
+                </a14:m>
+                <a:r>
+                  <a:rPr sz="2000">
+                    <a:solidFill>
+                      <a:srgbClr val="1E293B"/>
+                    </a:solidFill>
+                    <a:latin typeface="Calibri"/>
+                  </a:rPr>
+                  <a:t> + </a:t>
+                </a:r>
+                <a14:m>
+                  <m:oMath xmlns:m="http://schemas.openxmlformats.org/officeDocument/2006/math">
+                    <m:acc>
+                      <m:accPr>
+                        <m:chr m:val="⃗"/>
+                      </m:accPr>
+                      <m:e>
+                        <m:r>
+                          <a:rPr lang="vi-VN" sz="2000" b="0">
+                            <a:solidFill>
+                              <a:srgbClr val="1E293B"/>
+                            </a:solidFill>
+                            <a:latin typeface="Cambria Math" panose="02040503050406030204" pitchFamily="18" charset="0"/>
+                          </a:rPr>
+                          <m:t>AD</m:t>
+                        </m:r>
+                      </m:e>
+                    </m:acc>
+                  </m:oMath>
+                </a14:m>
+                <a:r>
+                  <a:rPr sz="2000">
+                    <a:solidFill>
+                      <a:srgbClr val="1E293B"/>
+                    </a:solidFill>
+                    <a:latin typeface="Calibri"/>
+                  </a:rPr>
+                  <a:t> = </a:t>
+                </a:r>
+                <a14:m>
+                  <m:oMath xmlns:m="http://schemas.openxmlformats.org/officeDocument/2006/math">
+                    <m:r>
+                      <a:rPr lang="vi-VN" sz="2000" b="0">
+                        <a:solidFill>
+                          <a:srgbClr val="1E293B"/>
+                        </a:solidFill>
+                        <a:latin typeface="Cambria Math" panose="02040503050406030204" pitchFamily="18" charset="0"/>
+                      </a:rPr>
+                      <m:t>2</m:t>
+                    </m:r>
+                  </m:oMath>
+                </a14:m>
+                <a:r>
+                  <a:rPr sz="2000">
+                    <a:solidFill>
+                      <a:srgbClr val="1E293B"/>
+                    </a:solidFill>
+                    <a:latin typeface="Calibri"/>
+                  </a:rPr>
+                  <a:t> </a:t>
+                </a:r>
+                <a14:m>
+                  <m:oMath xmlns:m="http://schemas.openxmlformats.org/officeDocument/2006/math">
+                    <m:acc>
+                      <m:accPr>
+                        <m:chr m:val="⃗"/>
+                      </m:accPr>
+                      <m:e>
+                        <m:r>
+                          <a:rPr lang="vi-VN" sz="2000" b="0">
+                            <a:solidFill>
+                              <a:srgbClr val="1E293B"/>
+                            </a:solidFill>
+                            <a:latin typeface="Cambria Math" panose="02040503050406030204" pitchFamily="18" charset="0"/>
+                          </a:rPr>
+                          <m:t>MN</m:t>
+                        </m:r>
+                      </m:e>
+                    </m:acc>
+                  </m:oMath>
+                </a14:m>
+                <a:r>
+                  <a:rPr sz="2000">
+                    <a:solidFill>
+                      <a:srgbClr val="1E293B"/>
+                    </a:solidFill>
+                    <a:latin typeface="Calibri"/>
+                  </a:rPr>
+                  <a:t> = </a:t>
+                </a:r>
+                <a14:m>
+                  <m:oMath xmlns:m="http://schemas.openxmlformats.org/officeDocument/2006/math">
+                    <m:acc>
+                      <m:accPr>
+                        <m:chr m:val="⃗"/>
+                      </m:accPr>
+                      <m:e>
+                        <m:r>
+                          <a:rPr lang="vi-VN" sz="2000" b="0">
+                            <a:solidFill>
+                              <a:srgbClr val="1E293B"/>
+                            </a:solidFill>
+                            <a:latin typeface="Cambria Math" panose="02040503050406030204" pitchFamily="18" charset="0"/>
+                          </a:rPr>
+                          <m:t>AC</m:t>
+                        </m:r>
+                      </m:e>
+                    </m:acc>
+                  </m:oMath>
+                </a14:m>
+                <a:r>
+                  <a:rPr sz="2000">
+                    <a:solidFill>
+                      <a:srgbClr val="1E293B"/>
+                    </a:solidFill>
+                    <a:latin typeface="Calibri"/>
+                  </a:rPr>
+                  <a:t> + </a:t>
+                </a:r>
+                <a14:m>
+                  <m:oMath xmlns:m="http://schemas.openxmlformats.org/officeDocument/2006/math">
+                    <m:acc>
+                      <m:accPr>
+                        <m:chr m:val="⃗"/>
+                      </m:accPr>
+                      <m:e>
+                        <m:r>
+                          <a:rPr lang="vi-VN" sz="2000" b="0">
+                            <a:solidFill>
+                              <a:srgbClr val="1E293B"/>
+                            </a:solidFill>
+                            <a:latin typeface="Cambria Math" panose="02040503050406030204" pitchFamily="18" charset="0"/>
+                          </a:rPr>
+                          <m:t>BD</m:t>
+                        </m:r>
+                      </m:e>
+                    </m:acc>
+                  </m:oMath>
+                </a14:m>
+                <a:r>
+                  <a:rPr sz="2000">
+                    <a:solidFill>
+                      <a:srgbClr val="1E293B"/>
+                    </a:solidFill>
+                    <a:latin typeface="Calibri"/>
+                  </a:rPr>
+                  <a:t>.</a:t>
+                </a:r>
+              </a:p>
+            </p:txBody>
+          </p:sp>
+        </mc:Choice>
+        <mc:Fallback>
+          <p:sp>
+            <p:nvSpPr>
+              <p:cNvPr id="10" name="TextBox 9"/>
+              <p:cNvSpPr txBox="1"/>
+              <p:nvPr/>
+            </p:nvSpPr>
+            <p:spPr>
+              <a:xfrm>
+                <a:off x="548640" y="2990088"/>
+                <a:ext cx="11064240" cy="783335"/>
+              </a:xfrm>
+              <a:prstGeom prst="rect">
+                <a:avLst/>
+              </a:prstGeom>
+              <a:noFill/>
+            </p:spPr>
+            <p:txBody>
+              <a:bodyPr wrap="square" anchor="t" lIns="45720" rIns="45720">
+                <a:spAutoFit/>
+              </a:bodyPr>
+              <a:lstStyle/>
+              <a:p>
+                <a:pPr algn="l">
+                  <a:spcAft>
+                    <a:spcPts val="800"/>
+                  </a:spcAft>
+                </a:pPr>
+                <a:r>
+                  <a:rPr sz="2000" b="1">
+                    <a:solidFill>
+                      <a:srgbClr val="1E293B"/>
+                    </a:solidFill>
+                    <a:latin typeface="Calibri"/>
+                  </a:rPr>
+                  <a:t>4.12.</a:t>
+                </a:r>
+                <a:r>
+                  <a:rPr sz="2000">
+                    <a:solidFill>
+                      <a:srgbClr val="1E293B"/>
+                    </a:solidFill>
+                    <a:latin typeface="Calibri"/>
+                  </a:rPr>
+                  <a:t> Cho tứ giác </a:t>
+                </a:r>
+                <a:r>
+                  <a:rPr lang="vi-VN"/>
+                  <a:t>ABCD</a:t>
+                </a:r>
+                <a:r>
+                  <a:rPr sz="2000">
+                    <a:solidFill>
+                      <a:srgbClr val="1E293B"/>
+                    </a:solidFill>
+                    <a:latin typeface="Calibri"/>
+                  </a:rPr>
+                  <a:t>. Gọi </a:t>
+                </a:r>
+                <a:r>
+                  <a:rPr lang="vi-VN"/>
+                  <a:t>M,\ N</a:t>
+                </a:r>
+                <a:r>
+                  <a:rPr sz="2000">
+                    <a:solidFill>
+                      <a:srgbClr val="1E293B"/>
+                    </a:solidFill>
+                    <a:latin typeface="Calibri"/>
+                  </a:rPr>
+                  <a:t> tương ứng là trung điểm của các cạnh </a:t>
+                </a:r>
+                <a:r>
+                  <a:rPr lang="vi-VN"/>
+                  <a:t>AB,\ CD</a:t>
+                </a:r>
+                <a:r>
+                  <a:rPr sz="2000">
+                    <a:solidFill>
+                      <a:srgbClr val="1E293B"/>
+                    </a:solidFill>
+                    <a:latin typeface="Calibri"/>
+                  </a:rPr>
+                  <a:t>. Chứng minh rằng </a:t>
+                </a:r>
+                <a:r>
+                  <a:rPr lang="vi-VN"/>
+                  <a:t>\overrightarrow{BC}</a:t>
+                </a:r>
+                <a:r>
+                  <a:rPr sz="2000">
+                    <a:solidFill>
+                      <a:srgbClr val="1E293B"/>
+                    </a:solidFill>
+                    <a:latin typeface="Calibri"/>
+                  </a:rPr>
+                  <a:t> + </a:t>
+                </a:r>
+                <a:r>
+                  <a:rPr lang="vi-VN"/>
+                  <a:t>\overrightarrow{AD}</a:t>
+                </a:r>
+                <a:r>
+                  <a:rPr sz="2000">
+                    <a:solidFill>
+                      <a:srgbClr val="1E293B"/>
+                    </a:solidFill>
+                    <a:latin typeface="Calibri"/>
+                  </a:rPr>
+                  <a:t> = </a:t>
+                </a:r>
+                <a:r>
+                  <a:rPr lang="vi-VN"/>
+                  <a:t>2</a:t>
+                </a:r>
+                <a:r>
+                  <a:rPr sz="2000">
+                    <a:solidFill>
+                      <a:srgbClr val="1E293B"/>
+                    </a:solidFill>
+                    <a:latin typeface="Calibri"/>
+                  </a:rPr>
+                  <a:t> </a:t>
+                </a:r>
+                <a:r>
+                  <a:rPr lang="vi-VN"/>
+                  <a:t>\overrightarrow{MN}</a:t>
+                </a:r>
+                <a:r>
+                  <a:rPr sz="2000">
+                    <a:solidFill>
+                      <a:srgbClr val="1E293B"/>
+                    </a:solidFill>
+                    <a:latin typeface="Calibri"/>
+                  </a:rPr>
+                  <a:t> = </a:t>
+                </a:r>
+                <a:r>
+                  <a:rPr lang="vi-VN"/>
+                  <a:t>\overrightarrow{AC}</a:t>
+                </a:r>
+                <a:r>
+                  <a:rPr sz="2000">
+                    <a:solidFill>
+                      <a:srgbClr val="1E293B"/>
+                    </a:solidFill>
+                    <a:latin typeface="Calibri"/>
+                  </a:rPr>
+                  <a:t> + </a:t>
+                </a:r>
+                <a:r>
+                  <a:rPr lang="vi-VN"/>
+                  <a:t>\overrightarrow{BD}</a:t>
+                </a:r>
+                <a:r>
+                  <a:rPr sz="2000">
+                    <a:solidFill>
+                      <a:srgbClr val="1E293B"/>
+                    </a:solidFill>
+                    <a:latin typeface="Calibri"/>
+                  </a:rPr>
+                  <a:t>.</a:t>
+                </a:r>
+              </a:p>
+            </p:txBody>
+          </p:sp>
+        </mc:Fallback>
+      </mc:AlternateContent>
       <p:sp>
         <p:nvSpPr>
-          <p:cNvPr id="10" name="s2_nen"/>
+          <p:cNvPr id="11" name="s3_nen"/>
           <p:cNvSpPr/>
           <p:nvPr/>
         </p:nvSpPr>
         <p:spPr>
           <a:xfrm>
-            <a:off x="548640" y="3800855"/>
+            <a:off x="548640" y="3837431"/>
             <a:ext cx="11064240" cy="874775"/>
           </a:xfrm>
           <a:prstGeom prst="roundRect">
@@ -29181,13 +29539,13 @@
         <mc:Choice xmlns:a14="http://schemas.microsoft.com/office/drawing/2010/main" Requires="a14">
           <p:sp>
             <p:nvSpPr>
-              <p:cNvPr id="11" name="s2_chu"/>
+              <p:cNvPr id="12" name="s3_chu"/>
               <p:cNvSpPr txBox="1"/>
               <p:nvPr/>
             </p:nvSpPr>
             <p:spPr>
               <a:xfrm>
-                <a:off x="713232" y="3837431"/>
+                <a:off x="713232" y="3874007"/>
                 <a:ext cx="10735056" cy="801623"/>
               </a:xfrm>
               <a:prstGeom prst="rect">
@@ -29775,13 +30133,13 @@
         <mc:Fallback>
           <p:sp>
             <p:nvSpPr>
-              <p:cNvPr id="11" name="TextBox 10"/>
+              <p:cNvPr id="12" name="TextBox 11"/>
               <p:cNvSpPr txBox="1"/>
               <p:nvPr/>
             </p:nvSpPr>
             <p:spPr>
               <a:xfrm>
-                <a:off x="713232" y="3837431"/>
+                <a:off x="713232" y="3874007"/>
                 <a:ext cx="10735056" cy="801623"/>
               </a:xfrm>
               <a:prstGeom prst="rect">
@@ -30194,21 +30552,66 @@
                                   </p:childTnLst>
                                 </p:cTn>
                               </p:par>
+                            </p:childTnLst>
+                          </p:cTn>
+                        </p:par>
+                      </p:childTnLst>
+                    </p:cTn>
+                  </p:par>
+                  <p:par>
+                    <p:cTn id="13" fill="hold">
+                      <p:stCondLst>
+                        <p:cond delay="indefinite"/>
+                      </p:stCondLst>
+                      <p:childTnLst>
+                        <p:par>
+                          <p:cTn id="14" fill="hold">
+                            <p:stCondLst>
+                              <p:cond delay="0"/>
+                            </p:stCondLst>
+                            <p:childTnLst>
                               <p:par>
-                                <p:cTn id="13" presetID="1" presetClass="entr" presetSubtype="0" fill="hold" nodeType="withEffect">
+                                <p:cTn id="15" presetID="1" presetClass="entr" presetSubtype="0" fill="hold" nodeType="clickEffect">
                                   <p:stCondLst>
                                     <p:cond delay="0"/>
                                   </p:stCondLst>
                                   <p:childTnLst>
                                     <p:set>
                                       <p:cBhvr>
-                                        <p:cTn id="14" dur="1" fill="hold">
+                                        <p:cTn id="16" dur="1" fill="hold">
                                           <p:stCondLst>
                                             <p:cond delay="0"/>
                                           </p:stCondLst>
                                         </p:cTn>
                                         <p:tgtEl>
                                           <p:spTgt spid="11"/>
+                                        </p:tgtEl>
+                                        <p:attrNameLst>
+                                          <p:attrName>style.visibility</p:attrName>
+                                        </p:attrNameLst>
+                                      </p:cBhvr>
+                                      <p:to>
+                                        <p:strVal val="visible"/>
+                                      </p:to>
+                                    </p:set>
+                                  </p:childTnLst>
+                                </p:cTn>
+                              </p:par>
+                              <p:par>
+                                <p:cTn id="17" presetID="1" presetClass="entr" presetSubtype="0" fill="hold" nodeType="withEffect">
+                                  <p:stCondLst>
+                                    <p:cond delay="0"/>
+                                  </p:stCondLst>
+                                  <p:childTnLst>
+                                    <p:set>
+                                      <p:cBhvr>
+                                        <p:cTn id="18" dur="1" fill="hold">
+                                          <p:stCondLst>
+                                            <p:cond delay="0"/>
+                                          </p:stCondLst>
+                                        </p:cTn>
+                                        <p:tgtEl>
+                                          <p:spTgt spid="12"/>
                                         </p:tgtEl>
                                         <p:attrNameLst>
                                           <p:attrName>style.visibility</p:attrName>
@@ -30491,7 +30894,7 @@
             <p:spPr>
               <a:xfrm>
                 <a:off x="548640" y="1371600"/>
-                <a:ext cx="11064240" cy="1767840"/>
+                <a:ext cx="11064240" cy="1057656"/>
               </a:xfrm>
               <a:prstGeom prst="rect">
                 <a:avLst/>
@@ -30892,395 +31295,6 @@
                   <a:t>.</a:t>
                 </a:r>
               </a:p>
-              <a:p>
-                <a:pPr algn="l">
-                  <a:spcAft>
-                    <a:spcPts val="800"/>
-                  </a:spcAft>
-                </a:pPr>
-                <a:r>
-                  <a:rPr sz="2000" b="1">
-                    <a:solidFill>
-                      <a:srgbClr val="1E293B"/>
-                    </a:solidFill>
-                    <a:latin typeface="Calibri"/>
-                  </a:rPr>
-                  <a:t>4.14.</a:t>
-                </a:r>
-                <a:r>
-                  <a:rPr sz="2000">
-                    <a:solidFill>
-                      <a:srgbClr val="1E293B"/>
-                    </a:solidFill>
-                    <a:latin typeface="Calibri"/>
-                  </a:rPr>
-                  <a:t> Cho tam giác </a:t>
-                </a:r>
-                <a14:m>
-                  <m:oMath xmlns:m="http://schemas.openxmlformats.org/officeDocument/2006/math">
-                    <m:r>
-                      <a:rPr lang="vi-VN" sz="2000" b="0">
-                        <a:solidFill>
-                          <a:srgbClr val="1E293B"/>
-                        </a:solidFill>
-                        <a:latin typeface="Cambria Math" panose="02040503050406030204" pitchFamily="18" charset="0"/>
-                      </a:rPr>
-                      <m:t>ABC</m:t>
-                    </m:r>
-                  </m:oMath>
-                </a14:m>
-                <a:r>
-                  <a:rPr sz="2000">
-                    <a:solidFill>
-                      <a:srgbClr val="1E293B"/>
-                    </a:solidFill>
-                    <a:latin typeface="Calibri"/>
-                  </a:rPr>
-                  <a:t>. a) Hãy xác định điểm </a:t>
-                </a:r>
-                <a14:m>
-                  <m:oMath xmlns:m="http://schemas.openxmlformats.org/officeDocument/2006/math">
-                    <m:r>
-                      <a:rPr lang="vi-VN" sz="2000" b="0">
-                        <a:solidFill>
-                          <a:srgbClr val="1E293B"/>
-                        </a:solidFill>
-                        <a:latin typeface="Cambria Math" panose="02040503050406030204" pitchFamily="18" charset="0"/>
-                      </a:rPr>
-                      <m:t>M</m:t>
-                    </m:r>
-                  </m:oMath>
-                </a14:m>
-                <a:r>
-                  <a:rPr sz="2000">
-                    <a:solidFill>
-                      <a:srgbClr val="1E293B"/>
-                    </a:solidFill>
-                    <a:latin typeface="Calibri"/>
-                  </a:rPr>
-                  <a:t> để </a:t>
-                </a:r>
-                <a14:m>
-                  <m:oMath xmlns:m="http://schemas.openxmlformats.org/officeDocument/2006/math">
-                    <m:acc>
-                      <m:accPr>
-                        <m:chr m:val="⃗"/>
-                      </m:accPr>
-                      <m:e>
-                        <m:r>
-                          <a:rPr lang="vi-VN" sz="2000" b="0">
-                            <a:solidFill>
-                              <a:srgbClr val="1E293B"/>
-                            </a:solidFill>
-                            <a:latin typeface="Cambria Math" panose="02040503050406030204" pitchFamily="18" charset="0"/>
-                          </a:rPr>
-                          <m:t>MA</m:t>
-                        </m:r>
-                      </m:e>
-                    </m:acc>
-                  </m:oMath>
-                </a14:m>
-                <a:r>
-                  <a:rPr sz="2000">
-                    <a:solidFill>
-                      <a:srgbClr val="1E293B"/>
-                    </a:solidFill>
-                    <a:latin typeface="Calibri"/>
-                  </a:rPr>
-                  <a:t> + </a:t>
-                </a:r>
-                <a14:m>
-                  <m:oMath xmlns:m="http://schemas.openxmlformats.org/officeDocument/2006/math">
-                    <m:acc>
-                      <m:accPr>
-                        <m:chr m:val="⃗"/>
-                      </m:accPr>
-                      <m:e>
-                        <m:r>
-                          <a:rPr lang="vi-VN" sz="2000" b="0">
-                            <a:solidFill>
-                              <a:srgbClr val="1E293B"/>
-                            </a:solidFill>
-                            <a:latin typeface="Cambria Math" panose="02040503050406030204" pitchFamily="18" charset="0"/>
-                          </a:rPr>
-                          <m:t>MB</m:t>
-                        </m:r>
-                      </m:e>
-                    </m:acc>
-                  </m:oMath>
-                </a14:m>
-                <a:r>
-                  <a:rPr sz="2000">
-                    <a:solidFill>
-                      <a:srgbClr val="1E293B"/>
-                    </a:solidFill>
-                    <a:latin typeface="Calibri"/>
-                  </a:rPr>
-                  <a:t> + </a:t>
-                </a:r>
-                <a14:m>
-                  <m:oMath xmlns:m="http://schemas.openxmlformats.org/officeDocument/2006/math">
-                    <m:r>
-                      <a:rPr lang="vi-VN" sz="2000" b="0">
-                        <a:solidFill>
-                          <a:srgbClr val="1E293B"/>
-                        </a:solidFill>
-                        <a:latin typeface="Cambria Math" panose="02040503050406030204" pitchFamily="18" charset="0"/>
-                      </a:rPr>
-                      <m:t>2</m:t>
-                    </m:r>
-                  </m:oMath>
-                </a14:m>
-                <a:r>
-                  <a:rPr sz="2000">
-                    <a:solidFill>
-                      <a:srgbClr val="1E293B"/>
-                    </a:solidFill>
-                    <a:latin typeface="Calibri"/>
-                  </a:rPr>
-                  <a:t> </a:t>
-                </a:r>
-                <a14:m>
-                  <m:oMath xmlns:m="http://schemas.openxmlformats.org/officeDocument/2006/math">
-                    <m:acc>
-                      <m:accPr>
-                        <m:chr m:val="⃗"/>
-                      </m:accPr>
-                      <m:e>
-                        <m:r>
-                          <a:rPr lang="vi-VN" sz="2000" b="0">
-                            <a:solidFill>
-                              <a:srgbClr val="1E293B"/>
-                            </a:solidFill>
-                            <a:latin typeface="Cambria Math" panose="02040503050406030204" pitchFamily="18" charset="0"/>
-                          </a:rPr>
-                          <m:t>MC</m:t>
-                        </m:r>
-                      </m:e>
-                    </m:acc>
-                  </m:oMath>
-                </a14:m>
-                <a:r>
-                  <a:rPr sz="2000">
-                    <a:solidFill>
-                      <a:srgbClr val="1E293B"/>
-                    </a:solidFill>
-                    <a:latin typeface="Calibri"/>
-                  </a:rPr>
-                  <a:t> = </a:t>
-                </a:r>
-                <a14:m>
-                  <m:oMath xmlns:m="http://schemas.openxmlformats.org/officeDocument/2006/math">
-                    <m:acc>
-                      <m:accPr>
-                        <m:chr m:val="⃗"/>
-                      </m:accPr>
-                      <m:e>
-                        <m:r>
-                          <a:rPr lang="vi-VN" sz="2000" b="0">
-                            <a:solidFill>
-                              <a:srgbClr val="1E293B"/>
-                            </a:solidFill>
-                            <a:latin typeface="Cambria Math" panose="02040503050406030204" pitchFamily="18" charset="0"/>
-                          </a:rPr>
-                          <m:t>0</m:t>
-                        </m:r>
-                      </m:e>
-                    </m:acc>
-                  </m:oMath>
-                </a14:m>
-                <a:r>
-                  <a:rPr sz="2000">
-                    <a:solidFill>
-                      <a:srgbClr val="1E293B"/>
-                    </a:solidFill>
-                    <a:latin typeface="Calibri"/>
-                  </a:rPr>
-                  <a:t>. b) Chứng minh rằng với mọi điểm </a:t>
-                </a:r>
-                <a14:m>
-                  <m:oMath xmlns:m="http://schemas.openxmlformats.org/officeDocument/2006/math">
-                    <m:r>
-                      <a:rPr lang="vi-VN" sz="2000" b="0">
-                        <a:solidFill>
-                          <a:srgbClr val="1E293B"/>
-                        </a:solidFill>
-                        <a:latin typeface="Cambria Math" panose="02040503050406030204" pitchFamily="18" charset="0"/>
-                      </a:rPr>
-                      <m:t>O</m:t>
-                    </m:r>
-                  </m:oMath>
-                </a14:m>
-                <a:r>
-                  <a:rPr sz="2000">
-                    <a:solidFill>
-                      <a:srgbClr val="1E293B"/>
-                    </a:solidFill>
-                    <a:latin typeface="Calibri"/>
-                  </a:rPr>
-                  <a:t>, ta có </a:t>
-                </a:r>
-                <a14:m>
-                  <m:oMath xmlns:m="http://schemas.openxmlformats.org/officeDocument/2006/math">
-                    <m:acc>
-                      <m:accPr>
-                        <m:chr m:val="⃗"/>
-                      </m:accPr>
-                      <m:e>
-                        <m:r>
-                          <a:rPr lang="vi-VN" sz="2000" b="0">
-                            <a:solidFill>
-                              <a:srgbClr val="1E293B"/>
-                            </a:solidFill>
-                            <a:latin typeface="Cambria Math" panose="02040503050406030204" pitchFamily="18" charset="0"/>
-                          </a:rPr>
-                          <m:t>OA</m:t>
-                        </m:r>
-                      </m:e>
-                    </m:acc>
-                  </m:oMath>
-                </a14:m>
-                <a:r>
-                  <a:rPr sz="2000">
-                    <a:solidFill>
-                      <a:srgbClr val="1E293B"/>
-                    </a:solidFill>
-                    <a:latin typeface="Calibri"/>
-                  </a:rPr>
-                  <a:t> + </a:t>
-                </a:r>
-                <a14:m>
-                  <m:oMath xmlns:m="http://schemas.openxmlformats.org/officeDocument/2006/math">
-                    <m:acc>
-                      <m:accPr>
-                        <m:chr m:val="⃗"/>
-                      </m:accPr>
-                      <m:e>
-                        <m:r>
-                          <a:rPr lang="vi-VN" sz="2000" b="0">
-                            <a:solidFill>
-                              <a:srgbClr val="1E293B"/>
-                            </a:solidFill>
-                            <a:latin typeface="Cambria Math" panose="02040503050406030204" pitchFamily="18" charset="0"/>
-                          </a:rPr>
-                          <m:t>OB</m:t>
-                        </m:r>
-                      </m:e>
-                    </m:acc>
-                  </m:oMath>
-                </a14:m>
-                <a:r>
-                  <a:rPr sz="2000">
-                    <a:solidFill>
-                      <a:srgbClr val="1E293B"/>
-                    </a:solidFill>
-                    <a:latin typeface="Calibri"/>
-                  </a:rPr>
-                  <a:t> + </a:t>
-                </a:r>
-                <a14:m>
-                  <m:oMath xmlns:m="http://schemas.openxmlformats.org/officeDocument/2006/math">
-                    <m:r>
-                      <a:rPr lang="vi-VN" sz="2000" b="0">
-                        <a:solidFill>
-                          <a:srgbClr val="1E293B"/>
-                        </a:solidFill>
-                        <a:latin typeface="Cambria Math" panose="02040503050406030204" pitchFamily="18" charset="0"/>
-                      </a:rPr>
-                      <m:t>2</m:t>
-                    </m:r>
-                  </m:oMath>
-                </a14:m>
-                <a:r>
-                  <a:rPr sz="2000">
-                    <a:solidFill>
-                      <a:srgbClr val="1E293B"/>
-                    </a:solidFill>
-                    <a:latin typeface="Calibri"/>
-                  </a:rPr>
-                  <a:t> </a:t>
-                </a:r>
-                <a14:m>
-                  <m:oMath xmlns:m="http://schemas.openxmlformats.org/officeDocument/2006/math">
-                    <m:acc>
-                      <m:accPr>
-                        <m:chr m:val="⃗"/>
-                      </m:accPr>
-                      <m:e>
-                        <m:r>
-                          <a:rPr lang="vi-VN" sz="2000" b="0">
-                            <a:solidFill>
-                              <a:srgbClr val="1E293B"/>
-                            </a:solidFill>
-                            <a:latin typeface="Cambria Math" panose="02040503050406030204" pitchFamily="18" charset="0"/>
-                          </a:rPr>
-                          <m:t>OC</m:t>
-                        </m:r>
-                      </m:e>
-                    </m:acc>
-                  </m:oMath>
-                </a14:m>
-                <a:r>
-                  <a:rPr sz="2000">
-                    <a:solidFill>
-                      <a:srgbClr val="1E293B"/>
-                    </a:solidFill>
-                    <a:latin typeface="Calibri"/>
-                  </a:rPr>
-                  <a:t> = </a:t>
-                </a:r>
-                <a14:m>
-                  <m:oMath xmlns:m="http://schemas.openxmlformats.org/officeDocument/2006/math">
-                    <m:r>
-                      <a:rPr lang="vi-VN" sz="2000" b="0">
-                        <a:solidFill>
-                          <a:srgbClr val="1E293B"/>
-                        </a:solidFill>
-                        <a:latin typeface="Cambria Math" panose="02040503050406030204" pitchFamily="18" charset="0"/>
-                      </a:rPr>
-                      <m:t>4</m:t>
-                    </m:r>
-                  </m:oMath>
-                </a14:m>
-                <a:r>
-                  <a:rPr sz="2000">
-                    <a:solidFill>
-                      <a:srgbClr val="1E293B"/>
-                    </a:solidFill>
-                    <a:latin typeface="Calibri"/>
-                  </a:rPr>
-                  <a:t> </a:t>
-                </a:r>
-                <a14:m>
-                  <m:oMath xmlns:m="http://schemas.openxmlformats.org/officeDocument/2006/math">
-                    <m:acc>
-                      <m:accPr>
-                        <m:chr m:val="⃗"/>
-                      </m:accPr>
-                      <m:e>
-                        <m:r>
-                          <a:rPr lang="vi-VN" sz="2000" b="0">
-                            <a:solidFill>
-                              <a:srgbClr val="1E293B"/>
-                            </a:solidFill>
-                            <a:latin typeface="Cambria Math" panose="02040503050406030204" pitchFamily="18" charset="0"/>
-                          </a:rPr>
-                          <m:t>OM</m:t>
-                        </m:r>
-                      </m:e>
-                    </m:acc>
-                  </m:oMath>
-                </a14:m>
-                <a:r>
-                  <a:rPr sz="2000">
-                    <a:solidFill>
-                      <a:srgbClr val="1E293B"/>
-                    </a:solidFill>
-                    <a:latin typeface="Calibri"/>
-                  </a:rPr>
-                  <a:t>.</a:t>
-                </a:r>
-              </a:p>
             </p:txBody>
           </p:sp>
         </mc:Choice>
@@ -31294,7 +31308,7 @@
             <p:spPr>
               <a:xfrm>
                 <a:off x="548640" y="1371600"/>
-                <a:ext cx="11064240" cy="1767840"/>
+                <a:ext cx="11064240" cy="1057656"/>
               </a:xfrm>
               <a:prstGeom prst="rect">
                 <a:avLst/>
@@ -31500,213 +31514,6 @@
                   <a:t>.</a:t>
                 </a:r>
               </a:p>
-              <a:p>
-                <a:pPr algn="l">
-                  <a:spcAft>
-                    <a:spcPts val="800"/>
-                  </a:spcAft>
-                </a:pPr>
-                <a:r>
-                  <a:rPr sz="2000" b="1">
-                    <a:solidFill>
-                      <a:srgbClr val="1E293B"/>
-                    </a:solidFill>
-                    <a:latin typeface="Calibri"/>
-                  </a:rPr>
-                  <a:t>4.14.</a:t>
-                </a:r>
-                <a:r>
-                  <a:rPr sz="2000">
-                    <a:solidFill>
-                      <a:srgbClr val="1E293B"/>
-                    </a:solidFill>
-                    <a:latin typeface="Calibri"/>
-                  </a:rPr>
-                  <a:t> Cho tam giác </a:t>
-                </a:r>
-                <a:r>
-                  <a:rPr lang="vi-VN"/>
-                  <a:t>ABC</a:t>
-                </a:r>
-                <a:r>
-                  <a:rPr sz="2000">
-                    <a:solidFill>
-                      <a:srgbClr val="1E293B"/>
-                    </a:solidFill>
-                    <a:latin typeface="Calibri"/>
-                  </a:rPr>
-                  <a:t>. a) Hãy xác định điểm </a:t>
-                </a:r>
-                <a:r>
-                  <a:rPr lang="vi-VN"/>
-                  <a:t>M</a:t>
-                </a:r>
-                <a:r>
-                  <a:rPr sz="2000">
-                    <a:solidFill>
-                      <a:srgbClr val="1E293B"/>
-                    </a:solidFill>
-                    <a:latin typeface="Calibri"/>
-                  </a:rPr>
-                  <a:t> để </a:t>
-                </a:r>
-                <a:r>
-                  <a:rPr lang="vi-VN"/>
-                  <a:t>\overrightarrow{MA}</a:t>
-                </a:r>
-                <a:r>
-                  <a:rPr sz="2000">
-                    <a:solidFill>
-                      <a:srgbClr val="1E293B"/>
-                    </a:solidFill>
-                    <a:latin typeface="Calibri"/>
-                  </a:rPr>
-                  <a:t> + </a:t>
-                </a:r>
-                <a:r>
-                  <a:rPr lang="vi-VN"/>
-                  <a:t>\overrightarrow{MB}</a:t>
-                </a:r>
-                <a:r>
-                  <a:rPr sz="2000">
-                    <a:solidFill>
-                      <a:srgbClr val="1E293B"/>
-                    </a:solidFill>
-                    <a:latin typeface="Calibri"/>
-                  </a:rPr>
-                  <a:t> + </a:t>
-                </a:r>
-                <a:r>
-                  <a:rPr lang="vi-VN"/>
-                  <a:t>2</a:t>
-                </a:r>
-                <a:r>
-                  <a:rPr sz="2000">
-                    <a:solidFill>
-                      <a:srgbClr val="1E293B"/>
-                    </a:solidFill>
-                    <a:latin typeface="Calibri"/>
-                  </a:rPr>
-                  <a:t> </a:t>
-                </a:r>
-                <a:r>
-                  <a:rPr lang="vi-VN"/>
-                  <a:t>\overrightarrow{MC}</a:t>
-                </a:r>
-                <a:r>
-                  <a:rPr sz="2000">
-                    <a:solidFill>
-                      <a:srgbClr val="1E293B"/>
-                    </a:solidFill>
-                    <a:latin typeface="Calibri"/>
-                  </a:rPr>
-                  <a:t> = </a:t>
-                </a:r>
-                <a:r>
-                  <a:rPr lang="vi-VN"/>
-                  <a:t>\vec{0}</a:t>
-                </a:r>
-                <a:r>
-                  <a:rPr sz="2000">
-                    <a:solidFill>
-                      <a:srgbClr val="1E293B"/>
-                    </a:solidFill>
-                    <a:latin typeface="Calibri"/>
-                  </a:rPr>
-                  <a:t>. b) Chứng minh rằng với mọi điểm </a:t>
-                </a:r>
-                <a:r>
-                  <a:rPr lang="vi-VN"/>
-                  <a:t>O</a:t>
-                </a:r>
-                <a:r>
-                  <a:rPr sz="2000">
-                    <a:solidFill>
-                      <a:srgbClr val="1E293B"/>
-                    </a:solidFill>
-                    <a:latin typeface="Calibri"/>
-                  </a:rPr>
-                  <a:t>, ta có </a:t>
-                </a:r>
-                <a:r>
-                  <a:rPr lang="vi-VN"/>
-                  <a:t>\overrightarrow{OA}</a:t>
-                </a:r>
-                <a:r>
-                  <a:rPr sz="2000">
-                    <a:solidFill>
-                      <a:srgbClr val="1E293B"/>
-                    </a:solidFill>
-                    <a:latin typeface="Calibri"/>
-                  </a:rPr>
-                  <a:t> + </a:t>
-                </a:r>
-                <a:r>
-                  <a:rPr lang="vi-VN"/>
-                  <a:t>\overrightarrow{OB}</a:t>
-                </a:r>
-                <a:r>
-                  <a:rPr sz="2000">
-                    <a:solidFill>
-                      <a:srgbClr val="1E293B"/>
-                    </a:solidFill>
-                    <a:latin typeface="Calibri"/>
-                  </a:rPr>
-                  <a:t> + </a:t>
-                </a:r>
-                <a:r>
-                  <a:rPr lang="vi-VN"/>
-                  <a:t>2</a:t>
-                </a:r>
-                <a:r>
-                  <a:rPr sz="2000">
-                    <a:solidFill>
-                      <a:srgbClr val="1E293B"/>
-                    </a:solidFill>
-                    <a:latin typeface="Calibri"/>
-                  </a:rPr>
-                  <a:t> </a:t>
-                </a:r>
-                <a:r>
-                  <a:rPr lang="vi-VN"/>
-                  <a:t>\overrightarrow{OC}</a:t>
-                </a:r>
-                <a:r>
-                  <a:rPr sz="2000">
-                    <a:solidFill>
-                      <a:srgbClr val="1E293B"/>
-                    </a:solidFill>
-                    <a:latin typeface="Calibri"/>
-                  </a:rPr>
-                  <a:t> = </a:t>
-                </a:r>
-                <a:r>
-                  <a:rPr lang="vi-VN"/>
-                  <a:t>4</a:t>
-                </a:r>
-                <a:r>
-                  <a:rPr sz="2000">
-                    <a:solidFill>
-                      <a:srgbClr val="1E293B"/>
-                    </a:solidFill>
-                    <a:latin typeface="Calibri"/>
-                  </a:rPr>
-                  <a:t> </a:t>
-                </a:r>
-                <a:r>
-                  <a:rPr lang="vi-VN"/>
-                  <a:t>\overrightarrow{OM}</a:t>
-                </a:r>
-                <a:r>
-                  <a:rPr sz="2000">
-                    <a:solidFill>
-                      <a:srgbClr val="1E293B"/>
-                    </a:solidFill>
-                    <a:latin typeface="Calibri"/>
-                  </a:rPr>
-                  <a:t>.</a:t>
-                </a:r>
-              </a:p>
             </p:txBody>
           </p:sp>
         </mc:Fallback>
@@ -31719,7 +31526,7 @@
         </p:nvSpPr>
         <p:spPr>
           <a:xfrm>
-            <a:off x="548640" y="3276599"/>
+            <a:off x="548640" y="2493264"/>
             <a:ext cx="11064240" cy="1286256"/>
           </a:xfrm>
           <a:prstGeom prst="roundRect">
@@ -31769,7 +31576,7 @@
             </p:nvSpPr>
             <p:spPr>
               <a:xfrm>
-                <a:off x="713232" y="3313175"/>
+                <a:off x="713232" y="2529840"/>
                 <a:ext cx="10735056" cy="1213104"/>
               </a:xfrm>
               <a:prstGeom prst="rect">
@@ -32451,7 +32258,7 @@
             </p:nvSpPr>
             <p:spPr>
               <a:xfrm>
-                <a:off x="713232" y="3313175"/>
+                <a:off x="713232" y="2529840"/>
                 <a:ext cx="10735056" cy="1213104"/>
               </a:xfrm>
               <a:prstGeom prst="rect">
@@ -32753,15 +32560,663 @@
           </p:sp>
         </mc:Fallback>
       </mc:AlternateContent>
+      <mc:AlternateContent xmlns:mc="http://schemas.openxmlformats.org/markup-compatibility/2006">
+        <mc:Choice xmlns:a14="http://schemas.microsoft.com/office/drawing/2010/main" Requires="a14">
+          <p:sp>
+            <p:nvSpPr>
+              <p:cNvPr id="10" name="s2_chu"/>
+              <p:cNvSpPr txBox="1"/>
+              <p:nvPr/>
+            </p:nvSpPr>
+            <p:spPr>
+              <a:xfrm>
+                <a:off x="548640" y="3843528"/>
+                <a:ext cx="11064240" cy="783335"/>
+              </a:xfrm>
+              <a:prstGeom prst="rect">
+                <a:avLst/>
+              </a:prstGeom>
+              <a:noFill/>
+            </p:spPr>
+            <p:txBody>
+              <a:bodyPr wrap="square" anchor="t" lIns="45720" rIns="45720">
+                <a:spAutoFit/>
+              </a:bodyPr>
+              <a:lstStyle/>
+              <a:p>
+                <a:pPr algn="l">
+                  <a:spcAft>
+                    <a:spcPts val="800"/>
+                  </a:spcAft>
+                </a:pPr>
+                <a:r>
+                  <a:rPr sz="2000" b="1">
+                    <a:solidFill>
+                      <a:srgbClr val="1E293B"/>
+                    </a:solidFill>
+                    <a:latin typeface="Calibri"/>
+                  </a:rPr>
+                  <a:t>4.14.</a:t>
+                </a:r>
+                <a:r>
+                  <a:rPr sz="2000">
+                    <a:solidFill>
+                      <a:srgbClr val="1E293B"/>
+                    </a:solidFill>
+                    <a:latin typeface="Calibri"/>
+                  </a:rPr>
+                  <a:t> Cho tam giác </a:t>
+                </a:r>
+                <a14:m>
+                  <m:oMath xmlns:m="http://schemas.openxmlformats.org/officeDocument/2006/math">
+                    <m:r>
+                      <a:rPr lang="vi-VN" sz="2000" b="0">
+                        <a:solidFill>
+                          <a:srgbClr val="1E293B"/>
+                        </a:solidFill>
+                        <a:latin typeface="Cambria Math" panose="02040503050406030204" pitchFamily="18" charset="0"/>
+                      </a:rPr>
+                      <m:t>ABC</m:t>
+                    </m:r>
+                  </m:oMath>
+                </a14:m>
+                <a:r>
+                  <a:rPr sz="2000">
+                    <a:solidFill>
+                      <a:srgbClr val="1E293B"/>
+                    </a:solidFill>
+                    <a:latin typeface="Calibri"/>
+                  </a:rPr>
+                  <a:t>. a) Hãy xác định điểm </a:t>
+                </a:r>
+                <a14:m>
+                  <m:oMath xmlns:m="http://schemas.openxmlformats.org/officeDocument/2006/math">
+                    <m:r>
+                      <a:rPr lang="vi-VN" sz="2000" b="0">
+                        <a:solidFill>
+                          <a:srgbClr val="1E293B"/>
+                        </a:solidFill>
+                        <a:latin typeface="Cambria Math" panose="02040503050406030204" pitchFamily="18" charset="0"/>
+                      </a:rPr>
+                      <m:t>M</m:t>
+                    </m:r>
+                  </m:oMath>
+                </a14:m>
+                <a:r>
+                  <a:rPr sz="2000">
+                    <a:solidFill>
+                      <a:srgbClr val="1E293B"/>
+                    </a:solidFill>
+                    <a:latin typeface="Calibri"/>
+                  </a:rPr>
+                  <a:t> để </a:t>
+                </a:r>
+                <a14:m>
+                  <m:oMath xmlns:m="http://schemas.openxmlformats.org/officeDocument/2006/math">
+                    <m:acc>
+                      <m:accPr>
+                        <m:chr m:val="⃗"/>
+                      </m:accPr>
+                      <m:e>
+                        <m:r>
+                          <a:rPr lang="vi-VN" sz="2000" b="0">
+                            <a:solidFill>
+                              <a:srgbClr val="1E293B"/>
+                            </a:solidFill>
+                            <a:latin typeface="Cambria Math" panose="02040503050406030204" pitchFamily="18" charset="0"/>
+                          </a:rPr>
+                          <m:t>MA</m:t>
+                        </m:r>
+                      </m:e>
+                    </m:acc>
+                  </m:oMath>
+                </a14:m>
+                <a:r>
+                  <a:rPr sz="2000">
+                    <a:solidFill>
+                      <a:srgbClr val="1E293B"/>
+                    </a:solidFill>
+                    <a:latin typeface="Calibri"/>
+                  </a:rPr>
+                  <a:t> + </a:t>
+                </a:r>
+                <a14:m>
+                  <m:oMath xmlns:m="http://schemas.openxmlformats.org/officeDocument/2006/math">
+                    <m:acc>
+                      <m:accPr>
+                        <m:chr m:val="⃗"/>
+                      </m:accPr>
+                      <m:e>
+                        <m:r>
+                          <a:rPr lang="vi-VN" sz="2000" b="0">
+                            <a:solidFill>
+                              <a:srgbClr val="1E293B"/>
+                            </a:solidFill>
+                            <a:latin typeface="Cambria Math" panose="02040503050406030204" pitchFamily="18" charset="0"/>
+                          </a:rPr>
+                          <m:t>MB</m:t>
+                        </m:r>
+                      </m:e>
+                    </m:acc>
+                  </m:oMath>
+                </a14:m>
+                <a:r>
+                  <a:rPr sz="2000">
+                    <a:solidFill>
+                      <a:srgbClr val="1E293B"/>
+                    </a:solidFill>
+                    <a:latin typeface="Calibri"/>
+                  </a:rPr>
+                  <a:t> + </a:t>
+                </a:r>
+                <a14:m>
+                  <m:oMath xmlns:m="http://schemas.openxmlformats.org/officeDocument/2006/math">
+                    <m:r>
+                      <a:rPr lang="vi-VN" sz="2000" b="0">
+                        <a:solidFill>
+                          <a:srgbClr val="1E293B"/>
+                        </a:solidFill>
+                        <a:latin typeface="Cambria Math" panose="02040503050406030204" pitchFamily="18" charset="0"/>
+                      </a:rPr>
+                      <m:t>2</m:t>
+                    </m:r>
+                  </m:oMath>
+                </a14:m>
+                <a:r>
+                  <a:rPr sz="2000">
+                    <a:solidFill>
+                      <a:srgbClr val="1E293B"/>
+                    </a:solidFill>
+                    <a:latin typeface="Calibri"/>
+                  </a:rPr>
+                  <a:t> </a:t>
+                </a:r>
+                <a14:m>
+                  <m:oMath xmlns:m="http://schemas.openxmlformats.org/officeDocument/2006/math">
+                    <m:acc>
+                      <m:accPr>
+                        <m:chr m:val="⃗"/>
+                      </m:accPr>
+                      <m:e>
+                        <m:r>
+                          <a:rPr lang="vi-VN" sz="2000" b="0">
+                            <a:solidFill>
+                              <a:srgbClr val="1E293B"/>
+                            </a:solidFill>
+                            <a:latin typeface="Cambria Math" panose="02040503050406030204" pitchFamily="18" charset="0"/>
+                          </a:rPr>
+                          <m:t>MC</m:t>
+                        </m:r>
+                      </m:e>
+                    </m:acc>
+                  </m:oMath>
+                </a14:m>
+                <a:r>
+                  <a:rPr sz="2000">
+                    <a:solidFill>
+                      <a:srgbClr val="1E293B"/>
+                    </a:solidFill>
+                    <a:latin typeface="Calibri"/>
+                  </a:rPr>
+                  <a:t> = </a:t>
+                </a:r>
+                <a14:m>
+                  <m:oMath xmlns:m="http://schemas.openxmlformats.org/officeDocument/2006/math">
+                    <m:acc>
+                      <m:accPr>
+                        <m:chr m:val="⃗"/>
+                      </m:accPr>
+                      <m:e>
+                        <m:r>
+                          <a:rPr lang="vi-VN" sz="2000" b="0">
+                            <a:solidFill>
+                              <a:srgbClr val="1E293B"/>
+                            </a:solidFill>
+                            <a:latin typeface="Cambria Math" panose="02040503050406030204" pitchFamily="18" charset="0"/>
+                          </a:rPr>
+                          <m:t>0</m:t>
+                        </m:r>
+                      </m:e>
+                    </m:acc>
+                  </m:oMath>
+                </a14:m>
+                <a:r>
+                  <a:rPr sz="2000">
+                    <a:solidFill>
+                      <a:srgbClr val="1E293B"/>
+                    </a:solidFill>
+                    <a:latin typeface="Calibri"/>
+                  </a:rPr>
+                  <a:t>. b) Chứng minh rằng với mọi điểm </a:t>
+                </a:r>
+                <a14:m>
+                  <m:oMath xmlns:m="http://schemas.openxmlformats.org/officeDocument/2006/math">
+                    <m:r>
+                      <a:rPr lang="vi-VN" sz="2000" b="0">
+                        <a:solidFill>
+                          <a:srgbClr val="1E293B"/>
+                        </a:solidFill>
+                        <a:latin typeface="Cambria Math" panose="02040503050406030204" pitchFamily="18" charset="0"/>
+                      </a:rPr>
+                      <m:t>O</m:t>
+                    </m:r>
+                  </m:oMath>
+                </a14:m>
+                <a:r>
+                  <a:rPr sz="2000">
+                    <a:solidFill>
+                      <a:srgbClr val="1E293B"/>
+                    </a:solidFill>
+                    <a:latin typeface="Calibri"/>
+                  </a:rPr>
+                  <a:t>, ta có </a:t>
+                </a:r>
+                <a14:m>
+                  <m:oMath xmlns:m="http://schemas.openxmlformats.org/officeDocument/2006/math">
+                    <m:acc>
+                      <m:accPr>
+                        <m:chr m:val="⃗"/>
+                      </m:accPr>
+                      <m:e>
+                        <m:r>
+                          <a:rPr lang="vi-VN" sz="2000" b="0">
+                            <a:solidFill>
+                              <a:srgbClr val="1E293B"/>
+                            </a:solidFill>
+                            <a:latin typeface="Cambria Math" panose="02040503050406030204" pitchFamily="18" charset="0"/>
+                          </a:rPr>
+                          <m:t>OA</m:t>
+                        </m:r>
+                      </m:e>
+                    </m:acc>
+                  </m:oMath>
+                </a14:m>
+                <a:r>
+                  <a:rPr sz="2000">
+                    <a:solidFill>
+                      <a:srgbClr val="1E293B"/>
+                    </a:solidFill>
+                    <a:latin typeface="Calibri"/>
+                  </a:rPr>
+                  <a:t> + </a:t>
+                </a:r>
+                <a14:m>
+                  <m:oMath xmlns:m="http://schemas.openxmlformats.org/officeDocument/2006/math">
+                    <m:acc>
+                      <m:accPr>
+                        <m:chr m:val="⃗"/>
+                      </m:accPr>
+                      <m:e>
+                        <m:r>
+                          <a:rPr lang="vi-VN" sz="2000" b="0">
+                            <a:solidFill>
+                              <a:srgbClr val="1E293B"/>
+                            </a:solidFill>
+                            <a:latin typeface="Cambria Math" panose="02040503050406030204" pitchFamily="18" charset="0"/>
+                          </a:rPr>
+                          <m:t>OB</m:t>
+                        </m:r>
+                      </m:e>
+                    </m:acc>
+                  </m:oMath>
+                </a14:m>
+                <a:r>
+                  <a:rPr sz="2000">
+                    <a:solidFill>
+                      <a:srgbClr val="1E293B"/>
+                    </a:solidFill>
+                    <a:latin typeface="Calibri"/>
+                  </a:rPr>
+                  <a:t> + </a:t>
+                </a:r>
+                <a14:m>
+                  <m:oMath xmlns:m="http://schemas.openxmlformats.org/officeDocument/2006/math">
+                    <m:r>
+                      <a:rPr lang="vi-VN" sz="2000" b="0">
+                        <a:solidFill>
+                          <a:srgbClr val="1E293B"/>
+                        </a:solidFill>
+                        <a:latin typeface="Cambria Math" panose="02040503050406030204" pitchFamily="18" charset="0"/>
+                      </a:rPr>
+                      <m:t>2</m:t>
+                    </m:r>
+                  </m:oMath>
+                </a14:m>
+                <a:r>
+                  <a:rPr sz="2000">
+                    <a:solidFill>
+                      <a:srgbClr val="1E293B"/>
+                    </a:solidFill>
+                    <a:latin typeface="Calibri"/>
+                  </a:rPr>
+                  <a:t> </a:t>
+                </a:r>
+                <a14:m>
+                  <m:oMath xmlns:m="http://schemas.openxmlformats.org/officeDocument/2006/math">
+                    <m:acc>
+                      <m:accPr>
+                        <m:chr m:val="⃗"/>
+                      </m:accPr>
+                      <m:e>
+                        <m:r>
+                          <a:rPr lang="vi-VN" sz="2000" b="0">
+                            <a:solidFill>
+                              <a:srgbClr val="1E293B"/>
+                            </a:solidFill>
+                            <a:latin typeface="Cambria Math" panose="02040503050406030204" pitchFamily="18" charset="0"/>
+                          </a:rPr>
+                          <m:t>OC</m:t>
+                        </m:r>
+                      </m:e>
+                    </m:acc>
+                  </m:oMath>
+                </a14:m>
+                <a:r>
+                  <a:rPr sz="2000">
+                    <a:solidFill>
+                      <a:srgbClr val="1E293B"/>
+                    </a:solidFill>
+                    <a:latin typeface="Calibri"/>
+                  </a:rPr>
+                  <a:t> = </a:t>
+                </a:r>
+                <a14:m>
+                  <m:oMath xmlns:m="http://schemas.openxmlformats.org/officeDocument/2006/math">
+                    <m:r>
+                      <a:rPr lang="vi-VN" sz="2000" b="0">
+                        <a:solidFill>
+                          <a:srgbClr val="1E293B"/>
+                        </a:solidFill>
+                        <a:latin typeface="Cambria Math" panose="02040503050406030204" pitchFamily="18" charset="0"/>
+                      </a:rPr>
+                      <m:t>4</m:t>
+                    </m:r>
+                  </m:oMath>
+                </a14:m>
+                <a:r>
+                  <a:rPr sz="2000">
+                    <a:solidFill>
+                      <a:srgbClr val="1E293B"/>
+                    </a:solidFill>
+                    <a:latin typeface="Calibri"/>
+                  </a:rPr>
+                  <a:t> </a:t>
+                </a:r>
+                <a14:m>
+                  <m:oMath xmlns:m="http://schemas.openxmlformats.org/officeDocument/2006/math">
+                    <m:acc>
+                      <m:accPr>
+                        <m:chr m:val="⃗"/>
+                      </m:accPr>
+                      <m:e>
+                        <m:r>
+                          <a:rPr lang="vi-VN" sz="2000" b="0">
+                            <a:solidFill>
+                              <a:srgbClr val="1E293B"/>
+                            </a:solidFill>
+                            <a:latin typeface="Cambria Math" panose="02040503050406030204" pitchFamily="18" charset="0"/>
+                          </a:rPr>
+                          <m:t>OM</m:t>
+                        </m:r>
+                      </m:e>
+                    </m:acc>
+                  </m:oMath>
+                </a14:m>
+                <a:r>
+                  <a:rPr sz="2000">
+                    <a:solidFill>
+                      <a:srgbClr val="1E293B"/>
+                    </a:solidFill>
+                    <a:latin typeface="Calibri"/>
+                  </a:rPr>
+                  <a:t>.</a:t>
+                </a:r>
+              </a:p>
+            </p:txBody>
+          </p:sp>
+        </mc:Choice>
+        <mc:Fallback>
+          <p:sp>
+            <p:nvSpPr>
+              <p:cNvPr id="10" name="TextBox 9"/>
+              <p:cNvSpPr txBox="1"/>
+              <p:nvPr/>
+            </p:nvSpPr>
+            <p:spPr>
+              <a:xfrm>
+                <a:off x="548640" y="3843528"/>
+                <a:ext cx="11064240" cy="783335"/>
+              </a:xfrm>
+              <a:prstGeom prst="rect">
+                <a:avLst/>
+              </a:prstGeom>
+              <a:noFill/>
+            </p:spPr>
+            <p:txBody>
+              <a:bodyPr wrap="square" anchor="t" lIns="45720" rIns="45720">
+                <a:spAutoFit/>
+              </a:bodyPr>
+              <a:lstStyle/>
+              <a:p>
+                <a:pPr algn="l">
+                  <a:spcAft>
+                    <a:spcPts val="800"/>
+                  </a:spcAft>
+                </a:pPr>
+                <a:r>
+                  <a:rPr sz="2000" b="1">
+                    <a:solidFill>
+                      <a:srgbClr val="1E293B"/>
+                    </a:solidFill>
+                    <a:latin typeface="Calibri"/>
+                  </a:rPr>
+                  <a:t>4.14.</a:t>
+                </a:r>
+                <a:r>
+                  <a:rPr sz="2000">
+                    <a:solidFill>
+                      <a:srgbClr val="1E293B"/>
+                    </a:solidFill>
+                    <a:latin typeface="Calibri"/>
+                  </a:rPr>
+                  <a:t> Cho tam giác </a:t>
+                </a:r>
+                <a:r>
+                  <a:rPr lang="vi-VN"/>
+                  <a:t>ABC</a:t>
+                </a:r>
+                <a:r>
+                  <a:rPr sz="2000">
+                    <a:solidFill>
+                      <a:srgbClr val="1E293B"/>
+                    </a:solidFill>
+                    <a:latin typeface="Calibri"/>
+                  </a:rPr>
+                  <a:t>. a) Hãy xác định điểm </a:t>
+                </a:r>
+                <a:r>
+                  <a:rPr lang="vi-VN"/>
+                  <a:t>M</a:t>
+                </a:r>
+                <a:r>
+                  <a:rPr sz="2000">
+                    <a:solidFill>
+                      <a:srgbClr val="1E293B"/>
+                    </a:solidFill>
+                    <a:latin typeface="Calibri"/>
+                  </a:rPr>
+                  <a:t> để </a:t>
+                </a:r>
+                <a:r>
+                  <a:rPr lang="vi-VN"/>
+                  <a:t>\overrightarrow{MA}</a:t>
+                </a:r>
+                <a:r>
+                  <a:rPr sz="2000">
+                    <a:solidFill>
+                      <a:srgbClr val="1E293B"/>
+                    </a:solidFill>
+                    <a:latin typeface="Calibri"/>
+                  </a:rPr>
+                  <a:t> + </a:t>
+                </a:r>
+                <a:r>
+                  <a:rPr lang="vi-VN"/>
+                  <a:t>\overrightarrow{MB}</a:t>
+                </a:r>
+                <a:r>
+                  <a:rPr sz="2000">
+                    <a:solidFill>
+                      <a:srgbClr val="1E293B"/>
+                    </a:solidFill>
+                    <a:latin typeface="Calibri"/>
+                  </a:rPr>
+                  <a:t> + </a:t>
+                </a:r>
+                <a:r>
+                  <a:rPr lang="vi-VN"/>
+                  <a:t>2</a:t>
+                </a:r>
+                <a:r>
+                  <a:rPr sz="2000">
+                    <a:solidFill>
+                      <a:srgbClr val="1E293B"/>
+                    </a:solidFill>
+                    <a:latin typeface="Calibri"/>
+                  </a:rPr>
+                  <a:t> </a:t>
+                </a:r>
+                <a:r>
+                  <a:rPr lang="vi-VN"/>
+                  <a:t>\overrightarrow{MC}</a:t>
+                </a:r>
+                <a:r>
+                  <a:rPr sz="2000">
+                    <a:solidFill>
+                      <a:srgbClr val="1E293B"/>
+                    </a:solidFill>
+                    <a:latin typeface="Calibri"/>
+                  </a:rPr>
+                  <a:t> = </a:t>
+                </a:r>
+                <a:r>
+                  <a:rPr lang="vi-VN"/>
+                  <a:t>\vec{0}</a:t>
+                </a:r>
+                <a:r>
+                  <a:rPr sz="2000">
+                    <a:solidFill>
+                      <a:srgbClr val="1E293B"/>
+                    </a:solidFill>
+                    <a:latin typeface="Calibri"/>
+                  </a:rPr>
+                  <a:t>. b) Chứng minh rằng với mọi điểm </a:t>
+                </a:r>
+                <a:r>
+                  <a:rPr lang="vi-VN"/>
+                  <a:t>O</a:t>
+                </a:r>
+                <a:r>
+                  <a:rPr sz="2000">
+                    <a:solidFill>
+                      <a:srgbClr val="1E293B"/>
+                    </a:solidFill>
+                    <a:latin typeface="Calibri"/>
+                  </a:rPr>
+                  <a:t>, ta có </a:t>
+                </a:r>
+                <a:r>
+                  <a:rPr lang="vi-VN"/>
+                  <a:t>\overrightarrow{OA}</a:t>
+                </a:r>
+                <a:r>
+                  <a:rPr sz="2000">
+                    <a:solidFill>
+                      <a:srgbClr val="1E293B"/>
+                    </a:solidFill>
+                    <a:latin typeface="Calibri"/>
+                  </a:rPr>
+                  <a:t> + </a:t>
+                </a:r>
+                <a:r>
+                  <a:rPr lang="vi-VN"/>
+                  <a:t>\overrightarrow{OB}</a:t>
+                </a:r>
+                <a:r>
+                  <a:rPr sz="2000">
+                    <a:solidFill>
+                      <a:srgbClr val="1E293B"/>
+                    </a:solidFill>
+                    <a:latin typeface="Calibri"/>
+                  </a:rPr>
+                  <a:t> + </a:t>
+                </a:r>
+                <a:r>
+                  <a:rPr lang="vi-VN"/>
+                  <a:t>2</a:t>
+                </a:r>
+                <a:r>
+                  <a:rPr sz="2000">
+                    <a:solidFill>
+                      <a:srgbClr val="1E293B"/>
+                    </a:solidFill>
+                    <a:latin typeface="Calibri"/>
+                  </a:rPr>
+                  <a:t> </a:t>
+                </a:r>
+                <a:r>
+                  <a:rPr lang="vi-VN"/>
+                  <a:t>\overrightarrow{OC}</a:t>
+                </a:r>
+                <a:r>
+                  <a:rPr sz="2000">
+                    <a:solidFill>
+                      <a:srgbClr val="1E293B"/>
+                    </a:solidFill>
+                    <a:latin typeface="Calibri"/>
+                  </a:rPr>
+                  <a:t> = </a:t>
+                </a:r>
+                <a:r>
+                  <a:rPr lang="vi-VN"/>
+                  <a:t>4</a:t>
+                </a:r>
+                <a:r>
+                  <a:rPr sz="2000">
+                    <a:solidFill>
+                      <a:srgbClr val="1E293B"/>
+                    </a:solidFill>
+                    <a:latin typeface="Calibri"/>
+                  </a:rPr>
+                  <a:t> </a:t>
+                </a:r>
+                <a:r>
+                  <a:rPr lang="vi-VN"/>
+                  <a:t>\overrightarrow{OM}</a:t>
+                </a:r>
+                <a:r>
+                  <a:rPr sz="2000">
+                    <a:solidFill>
+                      <a:srgbClr val="1E293B"/>
+                    </a:solidFill>
+                    <a:latin typeface="Calibri"/>
+                  </a:rPr>
+                  <a:t>.</a:t>
+                </a:r>
+              </a:p>
+            </p:txBody>
+          </p:sp>
+        </mc:Fallback>
+      </mc:AlternateContent>
       <p:sp>
         <p:nvSpPr>
-          <p:cNvPr id="10" name="s2_nen"/>
+          <p:cNvPr id="11" name="s3_nen"/>
           <p:cNvSpPr/>
           <p:nvPr/>
         </p:nvSpPr>
         <p:spPr>
           <a:xfrm>
-            <a:off x="548640" y="4654296"/>
+            <a:off x="548640" y="4690872"/>
             <a:ext cx="11064240" cy="874775"/>
           </a:xfrm>
           <a:prstGeom prst="roundRect">
@@ -32805,13 +33260,13 @@
         <mc:Choice xmlns:a14="http://schemas.microsoft.com/office/drawing/2010/main" Requires="a14">
           <p:sp>
             <p:nvSpPr>
-              <p:cNvPr id="11" name="s2_chu"/>
+              <p:cNvPr id="12" name="s3_chu"/>
               <p:cNvSpPr txBox="1"/>
               <p:nvPr/>
             </p:nvSpPr>
             <p:spPr>
               <a:xfrm>
-                <a:off x="713232" y="4690872"/>
+                <a:off x="713232" y="4727448"/>
                 <a:ext cx="10735056" cy="801623"/>
               </a:xfrm>
               <a:prstGeom prst="rect">
@@ -33394,13 +33849,13 @@
         <mc:Fallback>
           <p:sp>
             <p:nvSpPr>
-              <p:cNvPr id="11" name="TextBox 10"/>
+              <p:cNvPr id="12" name="TextBox 11"/>
               <p:cNvSpPr txBox="1"/>
               <p:nvPr/>
             </p:nvSpPr>
             <p:spPr>
               <a:xfrm>
-                <a:off x="713232" y="4690872"/>
+                <a:off x="713232" y="4727448"/>
                 <a:ext cx="10735056" cy="801623"/>
               </a:xfrm>
               <a:prstGeom prst="rect">
@@ -33839,21 +34294,66 @@
                                   </p:childTnLst>
                                 </p:cTn>
                               </p:par>
+                            </p:childTnLst>
+                          </p:cTn>
+                        </p:par>
+                      </p:childTnLst>
+                    </p:cTn>
+                  </p:par>
+                  <p:par>
+                    <p:cTn id="13" fill="hold">
+                      <p:stCondLst>
+                        <p:cond delay="indefinite"/>
+                      </p:stCondLst>
+                      <p:childTnLst>
+                        <p:par>
+                          <p:cTn id="14" fill="hold">
+                            <p:stCondLst>
+                              <p:cond delay="0"/>
+                            </p:stCondLst>
+                            <p:childTnLst>
                               <p:par>
-                                <p:cTn id="13" presetID="1" presetClass="entr" presetSubtype="0" fill="hold" nodeType="withEffect">
+                                <p:cTn id="15" presetID="1" presetClass="entr" presetSubtype="0" fill="hold" nodeType="clickEffect">
                                   <p:stCondLst>
                                     <p:cond delay="0"/>
                                   </p:stCondLst>
                                   <p:childTnLst>
                                     <p:set>
                                       <p:cBhvr>
-                                        <p:cTn id="14" dur="1" fill="hold">
+                                        <p:cTn id="16" dur="1" fill="hold">
                                           <p:stCondLst>
                                             <p:cond delay="0"/>
                                           </p:stCondLst>
                                         </p:cTn>
                                         <p:tgtEl>
                                           <p:spTgt spid="11"/>
+                                        </p:tgtEl>
+                                        <p:attrNameLst>
+                                          <p:attrName>style.visibility</p:attrName>
+                                        </p:attrNameLst>
+                                      </p:cBhvr>
+                                      <p:to>
+                                        <p:strVal val="visible"/>
+                                      </p:to>
+                                    </p:set>
+                                  </p:childTnLst>
+                                </p:cTn>
+                              </p:par>
+                              <p:par>
+                                <p:cTn id="17" presetID="1" presetClass="entr" presetSubtype="0" fill="hold" nodeType="withEffect">
+                                  <p:stCondLst>
+                                    <p:cond delay="0"/>
+                                  </p:stCondLst>
+                                  <p:childTnLst>
+                                    <p:set>
+                                      <p:cBhvr>
+                                        <p:cTn id="18" dur="1" fill="hold">
+                                          <p:stCondLst>
+                                            <p:cond delay="0"/>
+                                          </p:stCondLst>
+                                        </p:cTn>
+                                        <p:tgtEl>
+                                          <p:spTgt spid="12"/>
                                         </p:tgtEl>
                                         <p:attrNameLst>
                                           <p:attrName>style.visibility</p:attrName>
@@ -34759,8 +35259,8 @@
         </p:nvSpPr>
         <p:spPr>
           <a:xfrm>
-            <a:off x="548640" y="3611879"/>
-            <a:ext cx="11064240" cy="569976"/>
+            <a:off x="548640" y="2523744"/>
+            <a:ext cx="8138160" cy="569976"/>
           </a:xfrm>
           <a:prstGeom prst="roundRect">
             <a:avLst>
@@ -34809,8 +35309,8 @@
             </p:nvSpPr>
             <p:spPr>
               <a:xfrm>
-                <a:off x="713232" y="3648456"/>
-                <a:ext cx="10735056" cy="496824"/>
+                <a:off x="713232" y="2560320"/>
+                <a:ext cx="7808976" cy="496824"/>
               </a:xfrm>
               <a:prstGeom prst="rect">
                 <a:avLst/>
@@ -35192,8 +35692,8 @@
             </p:nvSpPr>
             <p:spPr>
               <a:xfrm>
-                <a:off x="713232" y="3648456"/>
-                <a:ext cx="10735056" cy="496824"/>
+                <a:off x="713232" y="2560320"/>
+                <a:ext cx="7808976" cy="496824"/>
               </a:xfrm>
               <a:prstGeom prst="rect">
                 <a:avLst/>
@@ -35298,8 +35798,8 @@
         </p:nvSpPr>
         <p:spPr>
           <a:xfrm>
-            <a:off x="548640" y="4273296"/>
-            <a:ext cx="11064240" cy="981455"/>
+            <a:off x="548640" y="3157728"/>
+            <a:ext cx="8138160" cy="1286256"/>
           </a:xfrm>
           <a:prstGeom prst="roundRect">
             <a:avLst>
@@ -35348,8 +35848,8 @@
             </p:nvSpPr>
             <p:spPr>
               <a:xfrm>
-                <a:off x="713232" y="4309872"/>
-                <a:ext cx="10735056" cy="908304"/>
+                <a:off x="713232" y="3194304"/>
+                <a:ext cx="7808976" cy="1213104"/>
               </a:xfrm>
               <a:prstGeom prst="rect">
                 <a:avLst/>
@@ -35858,8 +36358,8 @@
             </p:nvSpPr>
             <p:spPr>
               <a:xfrm>
-                <a:off x="713232" y="4309872"/>
-                <a:ext cx="10735056" cy="908304"/>
+                <a:off x="713232" y="3194304"/>
+                <a:ext cx="7808976" cy="1213104"/>
               </a:xfrm>
               <a:prstGeom prst="rect">
                 <a:avLst/>
@@ -42280,7 +42780,7 @@
       </mc:AlternateContent>
       <p:sp>
         <p:nvSpPr>
-          <p:cNvPr id="12" name="Rounded Rectangle 11"/>
+          <p:cNvPr id="12" name="s3_nen"/>
           <p:cNvSpPr/>
           <p:nvPr/>
         </p:nvSpPr>
@@ -42330,7 +42830,7 @@
         <mc:Choice xmlns:a14="http://schemas.microsoft.com/office/drawing/2010/main" Requires="a14">
           <p:sp>
             <p:nvSpPr>
-              <p:cNvPr id="13" name="TextBox 12"/>
+              <p:cNvPr id="13" name="s3_chu"/>
               <p:cNvSpPr txBox="1"/>
               <p:nvPr/>
             </p:nvSpPr>
@@ -42669,7 +43169,7 @@
         <mc:Choice xmlns:a14="http://schemas.microsoft.com/office/drawing/2010/main" Requires="a14">
           <p:sp>
             <p:nvSpPr>
-              <p:cNvPr id="14" name="TextBox 13"/>
+              <p:cNvPr id="14" name="s4_chu"/>
               <p:cNvSpPr txBox="1"/>
               <p:nvPr/>
             </p:nvSpPr>
@@ -42844,7 +43344,7 @@
       </mc:AlternateContent>
       <p:sp>
         <p:nvSpPr>
-          <p:cNvPr id="15" name="s3_nen"/>
+          <p:cNvPr id="15" name="s5_nen"/>
           <p:cNvSpPr/>
           <p:nvPr/>
         </p:nvSpPr>
@@ -42892,7 +43392,7 @@
       </p:sp>
       <p:sp>
         <p:nvSpPr>
-          <p:cNvPr id="16" name="s3_chu"/>
+          <p:cNvPr id="16" name="s5_chu"/>
           <p:cNvSpPr txBox="1"/>
           <p:nvPr/>
         </p:nvSpPr>
@@ -43175,7 +43675,7 @@
                                           </p:stCondLst>
                                         </p:cTn>
                                         <p:tgtEl>
-                                          <p:spTgt spid="15"/>
+                                          <p:spTgt spid="12"/>
                                         </p:tgtEl>
                                         <p:attrNameLst>
                                           <p:attrName>style.visibility</p:attrName>
@@ -43197,6 +43697,123 @@
                                     <p:set>
                                       <p:cBhvr>
                                         <p:cTn id="20" dur="1" fill="hold">
+                                          <p:stCondLst>
+                                            <p:cond delay="0"/>
+                                          </p:stCondLst>
+                                        </p:cTn>
+                                        <p:tgtEl>
+                                          <p:spTgt spid="13"/>
+                                        </p:tgtEl>
+                                        <p:attrNameLst>
+                                          <p:attrName>style.visibility</p:attrName>
+                                        </p:attrNameLst>
+                                      </p:cBhvr>
+                                      <p:to>
+                                        <p:strVal val="visible"/>
+                                      </p:to>
+                                    </p:set>
+                                  </p:childTnLst>
+                                </p:cTn>
+                              </p:par>
+                            </p:childTnLst>
+                          </p:cTn>
+                        </p:par>
+                      </p:childTnLst>
+                    </p:cTn>
+                  </p:par>
+                  <p:par>
+                    <p:cTn id="21" fill="hold">
+                      <p:stCondLst>
+                        <p:cond delay="indefinite"/>
+                      </p:stCondLst>
+                      <p:childTnLst>
+                        <p:par>
+                          <p:cTn id="22" fill="hold">
+                            <p:stCondLst>
+                              <p:cond delay="0"/>
+                            </p:stCondLst>
+                            <p:childTnLst>
+                              <p:par>
+                                <p:cTn id="23" presetID="1" presetClass="entr" presetSubtype="0" fill="hold" nodeType="clickEffect">
+                                  <p:stCondLst>
+                                    <p:cond delay="0"/>
+                                  </p:stCondLst>
+                                  <p:childTnLst>
+                                    <p:set>
+                                      <p:cBhvr>
+                                        <p:cTn id="24" dur="1" fill="hold">
+                                          <p:stCondLst>
+                                            <p:cond delay="0"/>
+                                          </p:stCondLst>
+                                        </p:cTn>
+                                        <p:tgtEl>
+                                          <p:spTgt spid="14"/>
+                                        </p:tgtEl>
+                                        <p:attrNameLst>
+                                          <p:attrName>style.visibility</p:attrName>
+                                        </p:attrNameLst>
+                                      </p:cBhvr>
+                                      <p:to>
+                                        <p:strVal val="visible"/>
+                                      </p:to>
+                                    </p:set>
+                                  </p:childTnLst>
+                                </p:cTn>
+                              </p:par>
+                            </p:childTnLst>
+                          </p:cTn>
+                        </p:par>
+                      </p:childTnLst>
+                    </p:cTn>
+                  </p:par>
+                  <p:par>
+                    <p:cTn id="25" fill="hold">
+                      <p:stCondLst>
+                        <p:cond delay="indefinite"/>
+                      </p:stCondLst>
+                      <p:childTnLst>
+                        <p:par>
+                          <p:cTn id="26" fill="hold">
+                            <p:stCondLst>
+                              <p:cond delay="0"/>
+                            </p:stCondLst>
+                            <p:childTnLst>
+                              <p:par>
+                                <p:cTn id="27" presetID="1" presetClass="entr" presetSubtype="0" fill="hold" nodeType="clickEffect">
+                                  <p:stCondLst>
+                                    <p:cond delay="0"/>
+                                  </p:stCondLst>
+                                  <p:childTnLst>
+                                    <p:set>
+                                      <p:cBhvr>
+                                        <p:cTn id="28" dur="1" fill="hold">
+                                          <p:stCondLst>
+                                            <p:cond delay="0"/>
+                                          </p:stCondLst>
+                                        </p:cTn>
+                                        <p:tgtEl>
+                                          <p:spTgt spid="15"/>
+                                        </p:tgtEl>
+                                        <p:attrNameLst>
+                                          <p:attrName>style.visibility</p:attrName>
+                                        </p:attrNameLst>
+                                      </p:cBhvr>
+                                      <p:to>
+                                        <p:strVal val="visible"/>
+                                      </p:to>
+                                    </p:set>
+                                  </p:childTnLst>
+                                </p:cTn>
+                              </p:par>
+                              <p:par>
+                                <p:cTn id="29" presetID="1" presetClass="entr" presetSubtype="0" fill="hold" nodeType="withEffect">
+                                  <p:stCondLst>
+                                    <p:cond delay="0"/>
+                                  </p:stCondLst>
+                                  <p:childTnLst>
+                                    <p:set>
+                                      <p:cBhvr>
+                                        <p:cTn id="30" dur="1" fill="hold">
                                           <p:stCondLst>
                                             <p:cond delay="0"/>
                                           </p:stCondLst>
@@ -44522,7 +45139,7 @@
       </mc:AlternateContent>
       <p:sp>
         <p:nvSpPr>
-          <p:cNvPr id="10" name="Rounded Rectangle 9"/>
+          <p:cNvPr id="10" name="s2_nen"/>
           <p:cNvSpPr/>
           <p:nvPr/>
         </p:nvSpPr>
@@ -44572,7 +45189,7 @@
         <mc:Choice xmlns:a14="http://schemas.microsoft.com/office/drawing/2010/main" Requires="a14">
           <p:sp>
             <p:nvSpPr>
-              <p:cNvPr id="11" name="TextBox 10"/>
+              <p:cNvPr id="11" name="s2_chu"/>
               <p:cNvSpPr txBox="1"/>
               <p:nvPr/>
             </p:nvSpPr>
@@ -45037,6 +45654,78 @@
                                         </p:cTn>
                                         <p:tgtEl>
                                           <p:spTgt spid="9"/>
+                                        </p:tgtEl>
+                                        <p:attrNameLst>
+                                          <p:attrName>style.visibility</p:attrName>
+                                        </p:attrNameLst>
+                                      </p:cBhvr>
+                                      <p:to>
+                                        <p:strVal val="visible"/>
+                                      </p:to>
+                                    </p:set>
+                                  </p:childTnLst>
+                                </p:cTn>
+                              </p:par>
+                            </p:childTnLst>
+                          </p:cTn>
+                        </p:par>
+                      </p:childTnLst>
+                    </p:cTn>
+                  </p:par>
+                  <p:par>
+                    <p:cTn id="9" fill="hold">
+                      <p:stCondLst>
+                        <p:cond delay="indefinite"/>
+                      </p:stCondLst>
+                      <p:childTnLst>
+                        <p:par>
+                          <p:cTn id="10" fill="hold">
+                            <p:stCondLst>
+                              <p:cond delay="0"/>
+                            </p:stCondLst>
+                            <p:childTnLst>
+                              <p:par>
+                                <p:cTn id="11" presetID="1" presetClass="entr" presetSubtype="0" fill="hold" nodeType="clickEffect">
+                                  <p:stCondLst>
+                                    <p:cond delay="0"/>
+                                  </p:stCondLst>
+                                  <p:childTnLst>
+                                    <p:set>
+                                      <p:cBhvr>
+                                        <p:cTn id="12" dur="1" fill="hold">
+                                          <p:stCondLst>
+                                            <p:cond delay="0"/>
+                                          </p:stCondLst>
+                                        </p:cTn>
+                                        <p:tgtEl>
+                                          <p:spTgt spid="10"/>
+                                        </p:tgtEl>
+                                        <p:attrNameLst>
+                                          <p:attrName>style.visibility</p:attrName>
+                                        </p:attrNameLst>
+                                      </p:cBhvr>
+                                      <p:to>
+                                        <p:strVal val="visible"/>
+                                      </p:to>
+                                    </p:set>
+                                  </p:childTnLst>
+                                </p:cTn>
+                              </p:par>
+                              <p:par>
+                                <p:cTn id="13" presetID="1" presetClass="entr" presetSubtype="0" fill="hold" nodeType="withEffect">
+                                  <p:stCondLst>
+                                    <p:cond delay="0"/>
+                                  </p:stCondLst>
+                                  <p:childTnLst>
+                                    <p:set>
+                                      <p:cBhvr>
+                                        <p:cTn id="14" dur="1" fill="hold">
+                                          <p:stCondLst>
+                                            <p:cond delay="0"/>
+                                          </p:stCondLst>
+                                        </p:cTn>
+                                        <p:tgtEl>
+                                          <p:spTgt spid="11"/>
                                         </p:tgtEl>
                                         <p:attrNameLst>
                                           <p:attrName>style.visibility</p:attrName>
@@ -45985,7 +46674,7 @@
       </mc:AlternateContent>
       <p:sp>
         <p:nvSpPr>
-          <p:cNvPr id="8" name="s2_nen"/>
+          <p:cNvPr id="8" name="s1_nen"/>
           <p:cNvSpPr/>
           <p:nvPr/>
         </p:nvSpPr>
@@ -46035,7 +46724,7 @@
         <mc:Choice xmlns:a14="http://schemas.microsoft.com/office/drawing/2010/main" Requires="a14">
           <p:sp>
             <p:nvSpPr>
-              <p:cNvPr id="9" name="s2_chu"/>
+              <p:cNvPr id="9" name="s1_chu"/>
               <p:cNvSpPr txBox="1"/>
               <p:nvPr/>
             </p:nvSpPr>
@@ -46350,7 +47039,7 @@
         <mc:Choice xmlns:a14="http://schemas.microsoft.com/office/drawing/2010/main" Requires="a14">
           <p:sp>
             <p:nvSpPr>
-              <p:cNvPr id="10" name="TextBox 9"/>
+              <p:cNvPr id="10" name="s2_chu"/>
               <p:cNvSpPr txBox="1"/>
               <p:nvPr/>
             </p:nvSpPr>
@@ -46861,6 +47550,51 @@
                                         </p:cTn>
                                         <p:tgtEl>
                                           <p:spTgt spid="9"/>
+                                        </p:tgtEl>
+                                        <p:attrNameLst>
+                                          <p:attrName>style.visibility</p:attrName>
+                                        </p:attrNameLst>
+                                      </p:cBhvr>
+                                      <p:to>
+                                        <p:strVal val="visible"/>
+                                      </p:to>
+                                    </p:set>
+                                  </p:childTnLst>
+                                </p:cTn>
+                              </p:par>
+                            </p:childTnLst>
+                          </p:cTn>
+                        </p:par>
+                      </p:childTnLst>
+                    </p:cTn>
+                  </p:par>
+                  <p:par>
+                    <p:cTn id="9" fill="hold">
+                      <p:stCondLst>
+                        <p:cond delay="indefinite"/>
+                      </p:stCondLst>
+                      <p:childTnLst>
+                        <p:par>
+                          <p:cTn id="10" fill="hold">
+                            <p:stCondLst>
+                              <p:cond delay="0"/>
+                            </p:stCondLst>
+                            <p:childTnLst>
+                              <p:par>
+                                <p:cTn id="11" presetID="1" presetClass="entr" presetSubtype="0" fill="hold" nodeType="clickEffect">
+                                  <p:stCondLst>
+                                    <p:cond delay="0"/>
+                                  </p:stCondLst>
+                                  <p:childTnLst>
+                                    <p:set>
+                                      <p:cBhvr>
+                                        <p:cTn id="12" dur="1" fill="hold">
+                                          <p:stCondLst>
+                                            <p:cond delay="0"/>
+                                          </p:stCondLst>
+                                        </p:cTn>
+                                        <p:tgtEl>
+                                          <p:spTgt spid="10"/>
                                         </p:tgtEl>
                                         <p:attrNameLst>
                                           <p:attrName>style.visibility</p:attrName>
@@ -47949,7 +48683,7 @@
         <mc:Choice xmlns:a14="http://schemas.microsoft.com/office/drawing/2010/main" Requires="a14">
           <p:sp>
             <p:nvSpPr>
-              <p:cNvPr id="10" name="TextBox 9"/>
+              <p:cNvPr id="10" name="s2_chu"/>
               <p:cNvSpPr txBox="1"/>
               <p:nvPr/>
             </p:nvSpPr>
@@ -48870,7 +49604,7 @@
       </mc:AlternateContent>
       <p:sp>
         <p:nvSpPr>
-          <p:cNvPr id="11" name="s2_nen"/>
+          <p:cNvPr id="11" name="s3_nen"/>
           <p:cNvSpPr/>
           <p:nvPr/>
         </p:nvSpPr>
@@ -48920,7 +49654,7 @@
         <mc:Choice xmlns:a14="http://schemas.microsoft.com/office/drawing/2010/main" Requires="a14">
           <p:sp>
             <p:nvSpPr>
-              <p:cNvPr id="12" name="s2_chu"/>
+              <p:cNvPr id="12" name="s3_chu"/>
               <p:cNvSpPr txBox="1"/>
               <p:nvPr/>
             </p:nvSpPr>
@@ -49217,6 +49951,51 @@
                                           </p:stCondLst>
                                         </p:cTn>
                                         <p:tgtEl>
+                                          <p:spTgt spid="10"/>
+                                        </p:tgtEl>
+                                        <p:attrNameLst>
+                                          <p:attrName>style.visibility</p:attrName>
+                                        </p:attrNameLst>
+                                      </p:cBhvr>
+                                      <p:to>
+                                        <p:strVal val="visible"/>
+                                      </p:to>
+                                    </p:set>
+                                  </p:childTnLst>
+                                </p:cTn>
+                              </p:par>
+                            </p:childTnLst>
+                          </p:cTn>
+                        </p:par>
+                      </p:childTnLst>
+                    </p:cTn>
+                  </p:par>
+                  <p:par>
+                    <p:cTn id="13" fill="hold">
+                      <p:stCondLst>
+                        <p:cond delay="indefinite"/>
+                      </p:stCondLst>
+                      <p:childTnLst>
+                        <p:par>
+                          <p:cTn id="14" fill="hold">
+                            <p:stCondLst>
+                              <p:cond delay="0"/>
+                            </p:stCondLst>
+                            <p:childTnLst>
+                              <p:par>
+                                <p:cTn id="15" presetID="1" presetClass="entr" presetSubtype="0" fill="hold" nodeType="clickEffect">
+                                  <p:stCondLst>
+                                    <p:cond delay="0"/>
+                                  </p:stCondLst>
+                                  <p:childTnLst>
+                                    <p:set>
+                                      <p:cBhvr>
+                                        <p:cTn id="16" dur="1" fill="hold">
+                                          <p:stCondLst>
+                                            <p:cond delay="0"/>
+                                          </p:stCondLst>
+                                        </p:cTn>
+                                        <p:tgtEl>
                                           <p:spTgt spid="11"/>
                                         </p:tgtEl>
                                         <p:attrNameLst>
@@ -49231,14 +50010,14 @@
                                 </p:cTn>
                               </p:par>
                               <p:par>
-                                <p:cTn id="13" presetID="1" presetClass="entr" presetSubtype="0" fill="hold" nodeType="withEffect">
+                                <p:cTn id="17" presetID="1" presetClass="entr" presetSubtype="0" fill="hold" nodeType="withEffect">
                                   <p:stCondLst>
                                     <p:cond delay="0"/>
                                   </p:stCondLst>
                                   <p:childTnLst>
                                     <p:set>
                                       <p:cBhvr>
-                                        <p:cTn id="14" dur="1" fill="hold">
+                                        <p:cTn id="18" dur="1" fill="hold">
                                           <p:stCondLst>
                                             <p:cond delay="0"/>
                                           </p:stCondLst>
